--- a/public/lessons/year-6-maths/spring/week-20/retrieve-decimal-and-percentage-methods/teaching-powerpoint-v1.pptx
+++ b/public/lessons/year-6-maths/spring/week-20/retrieve-decimal-and-percentage-methods/teaching-powerpoint-v1.pptx
@@ -2,24 +2,24 @@
 <file path=ppt/presentation.xml><?xml version="1.0" encoding="utf-8"?>
 <p:presentation xmlns:p="http://schemas.openxmlformats.org/presentationml/2006/main">
   <p:sldMasterIdLst>
-    <p:sldMasterId xmlns:r="http://schemas.openxmlformats.org/officeDocument/2006/relationships" id="2147483648" r:id="R6a5ef846c0c94bcd"/>
+    <p:sldMasterId xmlns:r="http://schemas.openxmlformats.org/officeDocument/2006/relationships" id="2147483648" r:id="R14bb6ef0eaf54ae2"/>
   </p:sldMasterIdLst>
   <p:notesMasterIdLst>
-    <p:notesMasterId xmlns:r="http://schemas.openxmlformats.org/officeDocument/2006/relationships" r:id="R8bf3b52175494197"/>
+    <p:notesMasterId xmlns:r="http://schemas.openxmlformats.org/officeDocument/2006/relationships" r:id="R227d664a14414e04"/>
   </p:notesMasterIdLst>
   <p:sldIdLst>
-    <p:sldId xmlns:r="http://schemas.openxmlformats.org/officeDocument/2006/relationships" id="256" r:id="R2ad52eed5d5d47ae"/>
-    <p:sldId xmlns:r="http://schemas.openxmlformats.org/officeDocument/2006/relationships" id="257" r:id="R73b91a5a48e74240"/>
-    <p:sldId xmlns:r="http://schemas.openxmlformats.org/officeDocument/2006/relationships" id="258" r:id="Rf5bd69a4d5b8418a"/>
-    <p:sldId xmlns:r="http://schemas.openxmlformats.org/officeDocument/2006/relationships" id="259" r:id="R06781ea138184b80"/>
-    <p:sldId xmlns:r="http://schemas.openxmlformats.org/officeDocument/2006/relationships" id="260" r:id="R4105b485399e415d"/>
-    <p:sldId xmlns:r="http://schemas.openxmlformats.org/officeDocument/2006/relationships" id="261" r:id="R58553bdbfa834288"/>
-    <p:sldId xmlns:r="http://schemas.openxmlformats.org/officeDocument/2006/relationships" id="262" r:id="Rffe51834d1ec4455"/>
-    <p:sldId xmlns:r="http://schemas.openxmlformats.org/officeDocument/2006/relationships" id="263" r:id="Raeffa51dcadb4a97"/>
-    <p:sldId xmlns:r="http://schemas.openxmlformats.org/officeDocument/2006/relationships" id="264" r:id="R3acf57afbbf64d8b"/>
-    <p:sldId xmlns:r="http://schemas.openxmlformats.org/officeDocument/2006/relationships" id="265" r:id="Rda7851efc3394498"/>
-    <p:sldId xmlns:r="http://schemas.openxmlformats.org/officeDocument/2006/relationships" id="266" r:id="R66801d10d3a8424f"/>
-    <p:sldId xmlns:r="http://schemas.openxmlformats.org/officeDocument/2006/relationships" id="267" r:id="R80088ef77f284ace"/>
+    <p:sldId xmlns:r="http://schemas.openxmlformats.org/officeDocument/2006/relationships" id="256" r:id="Rc62ada28e1514891"/>
+    <p:sldId xmlns:r="http://schemas.openxmlformats.org/officeDocument/2006/relationships" id="257" r:id="R1543d5e687be4b3e"/>
+    <p:sldId xmlns:r="http://schemas.openxmlformats.org/officeDocument/2006/relationships" id="258" r:id="R1b56b3adbc7a4579"/>
+    <p:sldId xmlns:r="http://schemas.openxmlformats.org/officeDocument/2006/relationships" id="259" r:id="R4c4a6a4b5e794610"/>
+    <p:sldId xmlns:r="http://schemas.openxmlformats.org/officeDocument/2006/relationships" id="260" r:id="R280e85bce4264824"/>
+    <p:sldId xmlns:r="http://schemas.openxmlformats.org/officeDocument/2006/relationships" id="261" r:id="R5fa79f7c92da4d6c"/>
+    <p:sldId xmlns:r="http://schemas.openxmlformats.org/officeDocument/2006/relationships" id="262" r:id="R87d27b99dee54d03"/>
+    <p:sldId xmlns:r="http://schemas.openxmlformats.org/officeDocument/2006/relationships" id="263" r:id="R8c7aa31e4a6e42f8"/>
+    <p:sldId xmlns:r="http://schemas.openxmlformats.org/officeDocument/2006/relationships" id="264" r:id="R08a0d357e7fd42bc"/>
+    <p:sldId xmlns:r="http://schemas.openxmlformats.org/officeDocument/2006/relationships" id="265" r:id="Rb6df627b3c774265"/>
+    <p:sldId xmlns:r="http://schemas.openxmlformats.org/officeDocument/2006/relationships" id="266" r:id="R772ce114c7334c66"/>
+    <p:sldId xmlns:r="http://schemas.openxmlformats.org/officeDocument/2006/relationships" id="267" r:id="R043999581cdd4245"/>
   </p:sldIdLst>
   <p:sldSz cx="12192000" cy="6858000"/>
   <p:notesSz cx="6858000" cy="9144000"/>
@@ -873,7 +873,7 @@
           <a:lstStyle xmlns:a="http://schemas.openxmlformats.org/drawingml/2006/main"/>
           <a:p xmlns:a="http://schemas.openxmlformats.org/drawingml/2006/main">
             <a:r>
-              <a:t>I do. Reveal the question, setup and each calculation stage one click at a time. Pupils watch before copying. Model answer: 240.</a:t>
+              <a:t>I do. Reveal the question, then reveal each mathematical change one click at a time. Point to the numbers and operation that changed before moving to the next line. Final answer: 240.</a:t>
             </a:r>
           </a:p>
         </p:txBody>
@@ -1291,7 +1291,7 @@
   </p:cSld>
   <p:clrMap bg1="lt1" tx1="dk1" bg2="lt2" tx2="dk2" accent1="accent1" accent2="accent2" accent3="accent3" accent4="accent4" accent5="accent5" accent6="accent6" hlink="hlink" folHlink="folHlink"/>
   <p:sldLayoutIdLst>
-    <p:sldLayoutId xmlns:r="http://schemas.openxmlformats.org/officeDocument/2006/relationships" id="2147483649" r:id="R184ca485049241e3"/>
+    <p:sldLayoutId xmlns:r="http://schemas.openxmlformats.org/officeDocument/2006/relationships" id="2147483649" r:id="Rfcdba68502a1460a"/>
   </p:sldLayoutIdLst>
   <p:txStyles>
     <p:titleStyle>
@@ -1842,7 +1842,7 @@
           <p:cNvPr id="12" name="">
             <a:extLst xmlns:a="http://schemas.openxmlformats.org/drawingml/2006/main">
               <a:ext uri="{FF2B5EF4-FFF2-40B4-BE49-F238E27FC236}">
-                <a16:creationId xmlns:a16="http://schemas.microsoft.com/office/drawing/2014/main" id="{92D40D8C-ED22-411B-AFC5-694664CB23B1}"/>
+                <a16:creationId xmlns:a16="http://schemas.microsoft.com/office/drawing/2014/main" id="{3C0F88FE-8E7F-4B34-879A-8D358DA006F2}"/>
               </a:ext>
             </a:extLst>
           </p:cNvPr>
@@ -1874,7 +1874,7 @@
           <p:cNvPr id="2" name="">
             <a:extLst xmlns:a="http://schemas.openxmlformats.org/drawingml/2006/main">
               <a:ext uri="{FF2B5EF4-FFF2-40B4-BE49-F238E27FC236}">
-                <a16:creationId xmlns:a16="http://schemas.microsoft.com/office/drawing/2014/main" id="{49F9AEA5-6FD9-40DF-8B38-ED14D4A241AA}"/>
+                <a16:creationId xmlns:a16="http://schemas.microsoft.com/office/drawing/2014/main" id="{98FB290B-7B46-41D2-8FD3-42008AB9948E}"/>
               </a:ext>
             </a:extLst>
           </p:cNvPr>
@@ -1931,7 +1931,7 @@
           <p:cNvPr id="3" name="">
             <a:extLst xmlns:a="http://schemas.openxmlformats.org/drawingml/2006/main">
               <a:ext uri="{FF2B5EF4-FFF2-40B4-BE49-F238E27FC236}">
-                <a16:creationId xmlns:a16="http://schemas.microsoft.com/office/drawing/2014/main" id="{08B9C2A3-40E2-4B96-A9DE-96F923D42DE3}"/>
+                <a16:creationId xmlns:a16="http://schemas.microsoft.com/office/drawing/2014/main" id="{C6E0BAF1-913D-4D89-B91E-940C58B32921}"/>
               </a:ext>
             </a:extLst>
           </p:cNvPr>
@@ -1965,7 +1965,7 @@
           <p:cNvPr id="4" name="">
             <a:extLst xmlns:a="http://schemas.openxmlformats.org/drawingml/2006/main">
               <a:ext uri="{FF2B5EF4-FFF2-40B4-BE49-F238E27FC236}">
-                <a16:creationId xmlns:a16="http://schemas.microsoft.com/office/drawing/2014/main" id="{2BBD4A2C-EC1B-4693-B690-6AF3174ED98C}"/>
+                <a16:creationId xmlns:a16="http://schemas.microsoft.com/office/drawing/2014/main" id="{A1041462-1A32-4ECE-917C-7851ABA0AC09}"/>
               </a:ext>
             </a:extLst>
           </p:cNvPr>
@@ -2022,7 +2022,7 @@
           <p:cNvPr id="5" name="">
             <a:extLst xmlns:a="http://schemas.openxmlformats.org/drawingml/2006/main">
               <a:ext uri="{FF2B5EF4-FFF2-40B4-BE49-F238E27FC236}">
-                <a16:creationId xmlns:a16="http://schemas.microsoft.com/office/drawing/2014/main" id="{63FCD292-EC45-461F-B8D9-CDA8BA754A43}"/>
+                <a16:creationId xmlns:a16="http://schemas.microsoft.com/office/drawing/2014/main" id="{E96844DB-BF27-48DC-A993-CCF6CBF4AF4F}"/>
               </a:ext>
             </a:extLst>
           </p:cNvPr>
@@ -2079,7 +2079,7 @@
           <p:cNvPr id="6" name="">
             <a:extLst xmlns:a="http://schemas.openxmlformats.org/drawingml/2006/main">
               <a:ext uri="{FF2B5EF4-FFF2-40B4-BE49-F238E27FC236}">
-                <a16:creationId xmlns:a16="http://schemas.microsoft.com/office/drawing/2014/main" id="{7C4F0F80-4779-4E3D-8985-DEA05BB44D4C}"/>
+                <a16:creationId xmlns:a16="http://schemas.microsoft.com/office/drawing/2014/main" id="{FA7E2F37-716D-4C0B-9333-10E38131D8C7}"/>
               </a:ext>
             </a:extLst>
           </p:cNvPr>
@@ -2113,7 +2113,7 @@
           <p:cNvPr id="7" name="">
             <a:extLst xmlns:a="http://schemas.openxmlformats.org/drawingml/2006/main">
               <a:ext uri="{FF2B5EF4-FFF2-40B4-BE49-F238E27FC236}">
-                <a16:creationId xmlns:a16="http://schemas.microsoft.com/office/drawing/2014/main" id="{F8B82F1F-4D90-4EA7-9AA2-4A28620CFE82}"/>
+                <a16:creationId xmlns:a16="http://schemas.microsoft.com/office/drawing/2014/main" id="{A43C69CC-1A41-44D1-A8D5-DD401D61D89A}"/>
               </a:ext>
             </a:extLst>
           </p:cNvPr>
@@ -2170,7 +2170,7 @@
           <p:cNvPr id="8" name="">
             <a:extLst xmlns:a="http://schemas.openxmlformats.org/drawingml/2006/main">
               <a:ext uri="{FF2B5EF4-FFF2-40B4-BE49-F238E27FC236}">
-                <a16:creationId xmlns:a16="http://schemas.microsoft.com/office/drawing/2014/main" id="{657F125D-2F9D-4CE0-8490-85034780D088}"/>
+                <a16:creationId xmlns:a16="http://schemas.microsoft.com/office/drawing/2014/main" id="{D75719AF-7FDC-48B1-8315-2748650AF995}"/>
               </a:ext>
             </a:extLst>
           </p:cNvPr>
@@ -2227,7 +2227,7 @@
           <p:cNvPr id="9" name="">
             <a:extLst xmlns:a="http://schemas.openxmlformats.org/drawingml/2006/main">
               <a:ext uri="{FF2B5EF4-FFF2-40B4-BE49-F238E27FC236}">
-                <a16:creationId xmlns:a16="http://schemas.microsoft.com/office/drawing/2014/main" id="{E97632A1-E782-44BE-9CD9-176566E233EA}"/>
+                <a16:creationId xmlns:a16="http://schemas.microsoft.com/office/drawing/2014/main" id="{C760D71E-6C7C-47DE-AD03-135FF566C9F1}"/>
               </a:ext>
             </a:extLst>
           </p:cNvPr>
@@ -2284,7 +2284,7 @@
           <p:cNvPr id="10" name="">
             <a:extLst xmlns:a="http://schemas.openxmlformats.org/drawingml/2006/main">
               <a:ext uri="{FF2B5EF4-FFF2-40B4-BE49-F238E27FC236}">
-                <a16:creationId xmlns:a16="http://schemas.microsoft.com/office/drawing/2014/main" id="{44B423D6-A967-4DAD-AEF5-38F77FD26041}"/>
+                <a16:creationId xmlns:a16="http://schemas.microsoft.com/office/drawing/2014/main" id="{AD180F60-09E0-45C4-A333-8F4B9833CA1C}"/>
               </a:ext>
             </a:extLst>
           </p:cNvPr>
@@ -2341,7 +2341,7 @@
           <p:cNvPr id="11" name="">
             <a:extLst xmlns:a="http://schemas.openxmlformats.org/drawingml/2006/main">
               <a:ext uri="{FF2B5EF4-FFF2-40B4-BE49-F238E27FC236}">
-                <a16:creationId xmlns:a16="http://schemas.microsoft.com/office/drawing/2014/main" id="{EFFEBDAF-4992-44BD-9226-8D19DFA7DD68}"/>
+                <a16:creationId xmlns:a16="http://schemas.microsoft.com/office/drawing/2014/main" id="{07C64380-AC76-4918-B058-FD8DA2766F65}"/>
               </a:ext>
             </a:extLst>
           </p:cNvPr>
@@ -2396,7 +2396,7 @@
     </p:spTree>
     <p:extLst>
       <p:ext uri="{BB962C8B-B14F-4D97-AF65-F5344CB8AC3E}">
-        <p14:creationId xmlns:p14="http://schemas.microsoft.com/office/powerpoint/2010/main" val="1895703662"/>
+        <p14:creationId xmlns:p14="http://schemas.microsoft.com/office/powerpoint/2010/main" val="1569970747"/>
       </p:ext>
     </p:extLst>
   </p:cSld>
@@ -2427,7 +2427,7 @@
           <p:cNvPr id="14" name="">
             <a:extLst xmlns:a="http://schemas.openxmlformats.org/drawingml/2006/main">
               <a:ext uri="{FF2B5EF4-FFF2-40B4-BE49-F238E27FC236}">
-                <a16:creationId xmlns:a16="http://schemas.microsoft.com/office/drawing/2014/main" id="{42E35BC9-7B82-47EA-8EEA-F4395A639346}"/>
+                <a16:creationId xmlns:a16="http://schemas.microsoft.com/office/drawing/2014/main" id="{B9F89217-1BAF-46FA-86E6-2AC16851FC23}"/>
               </a:ext>
             </a:extLst>
           </p:cNvPr>
@@ -2459,7 +2459,7 @@
           <p:cNvPr id="2" name="">
             <a:extLst xmlns:a="http://schemas.openxmlformats.org/drawingml/2006/main">
               <a:ext uri="{FF2B5EF4-FFF2-40B4-BE49-F238E27FC236}">
-                <a16:creationId xmlns:a16="http://schemas.microsoft.com/office/drawing/2014/main" id="{0A4B8221-A81E-4D4F-87A8-8AF57D9278C3}"/>
+                <a16:creationId xmlns:a16="http://schemas.microsoft.com/office/drawing/2014/main" id="{F7E8E835-E8C7-4807-B3D0-64B20D8AC02C}"/>
               </a:ext>
             </a:extLst>
           </p:cNvPr>
@@ -2516,7 +2516,7 @@
           <p:cNvPr id="3" name="">
             <a:extLst xmlns:a="http://schemas.openxmlformats.org/drawingml/2006/main">
               <a:ext uri="{FF2B5EF4-FFF2-40B4-BE49-F238E27FC236}">
-                <a16:creationId xmlns:a16="http://schemas.microsoft.com/office/drawing/2014/main" id="{4A99FBC2-2898-4C5E-9DDA-8C50AD37C7D9}"/>
+                <a16:creationId xmlns:a16="http://schemas.microsoft.com/office/drawing/2014/main" id="{FAFF11D2-A1B1-4FAC-A1BB-666E9952E109}"/>
               </a:ext>
             </a:extLst>
           </p:cNvPr>
@@ -2548,7 +2548,7 @@
           <p:cNvPr id="4" name="">
             <a:extLst xmlns:a="http://schemas.openxmlformats.org/drawingml/2006/main">
               <a:ext uri="{FF2B5EF4-FFF2-40B4-BE49-F238E27FC236}">
-                <a16:creationId xmlns:a16="http://schemas.microsoft.com/office/drawing/2014/main" id="{B793D465-BF30-4417-BC02-A4EBB64E74F8}"/>
+                <a16:creationId xmlns:a16="http://schemas.microsoft.com/office/drawing/2014/main" id="{5B60F5B7-F292-411A-8DAF-CD42CB7C33A8}"/>
               </a:ext>
             </a:extLst>
           </p:cNvPr>
@@ -2605,7 +2605,7 @@
           <p:cNvPr id="5" name="">
             <a:extLst xmlns:a="http://schemas.openxmlformats.org/drawingml/2006/main">
               <a:ext uri="{FF2B5EF4-FFF2-40B4-BE49-F238E27FC236}">
-                <a16:creationId xmlns:a16="http://schemas.microsoft.com/office/drawing/2014/main" id="{9428B124-1CC6-4EA6-9997-5FB40163D72D}"/>
+                <a16:creationId xmlns:a16="http://schemas.microsoft.com/office/drawing/2014/main" id="{4EF8C2DC-41B4-4456-A2AE-AB4DFC1B3ECC}"/>
               </a:ext>
             </a:extLst>
           </p:cNvPr>
@@ -2662,7 +2662,7 @@
           <p:cNvPr id="6" name="">
             <a:extLst xmlns:a="http://schemas.openxmlformats.org/drawingml/2006/main">
               <a:ext uri="{FF2B5EF4-FFF2-40B4-BE49-F238E27FC236}">
-                <a16:creationId xmlns:a16="http://schemas.microsoft.com/office/drawing/2014/main" id="{AF6617C8-9D54-437F-9A94-90E71FFF7F18}"/>
+                <a16:creationId xmlns:a16="http://schemas.microsoft.com/office/drawing/2014/main" id="{59B7BD0F-0AA6-4AA8-BA04-F99F8E0F21A9}"/>
               </a:ext>
             </a:extLst>
           </p:cNvPr>
@@ -2719,7 +2719,7 @@
           <p:cNvPr id="7" name="">
             <a:extLst xmlns:a="http://schemas.openxmlformats.org/drawingml/2006/main">
               <a:ext uri="{FF2B5EF4-FFF2-40B4-BE49-F238E27FC236}">
-                <a16:creationId xmlns:a16="http://schemas.microsoft.com/office/drawing/2014/main" id="{AA15FD64-C354-4D14-BC21-6CC1C17F5D5F}"/>
+                <a16:creationId xmlns:a16="http://schemas.microsoft.com/office/drawing/2014/main" id="{D3201728-58CA-46FD-AC9A-00521B1ABC7E}"/>
               </a:ext>
             </a:extLst>
           </p:cNvPr>
@@ -2751,7 +2751,7 @@
           <p:cNvPr id="8" name="">
             <a:extLst xmlns:a="http://schemas.openxmlformats.org/drawingml/2006/main">
               <a:ext uri="{FF2B5EF4-FFF2-40B4-BE49-F238E27FC236}">
-                <a16:creationId xmlns:a16="http://schemas.microsoft.com/office/drawing/2014/main" id="{9234B7B3-F78C-45AF-84B9-5E0655762D4A}"/>
+                <a16:creationId xmlns:a16="http://schemas.microsoft.com/office/drawing/2014/main" id="{E59DA156-6CEF-44C9-8148-8541CBE24728}"/>
               </a:ext>
             </a:extLst>
           </p:cNvPr>
@@ -2808,7 +2808,7 @@
           <p:cNvPr id="9" name="">
             <a:extLst xmlns:a="http://schemas.openxmlformats.org/drawingml/2006/main">
               <a:ext uri="{FF2B5EF4-FFF2-40B4-BE49-F238E27FC236}">
-                <a16:creationId xmlns:a16="http://schemas.microsoft.com/office/drawing/2014/main" id="{E40240BB-3C44-4BF5-BDD0-FE2807665693}"/>
+                <a16:creationId xmlns:a16="http://schemas.microsoft.com/office/drawing/2014/main" id="{A847209D-6A30-46CD-8E0B-08D084B16F37}"/>
               </a:ext>
             </a:extLst>
           </p:cNvPr>
@@ -2865,7 +2865,7 @@
           <p:cNvPr id="10" name="">
             <a:extLst xmlns:a="http://schemas.openxmlformats.org/drawingml/2006/main">
               <a:ext uri="{FF2B5EF4-FFF2-40B4-BE49-F238E27FC236}">
-                <a16:creationId xmlns:a16="http://schemas.microsoft.com/office/drawing/2014/main" id="{EE8891B9-7555-4D04-97F6-EF90EA9AFF32}"/>
+                <a16:creationId xmlns:a16="http://schemas.microsoft.com/office/drawing/2014/main" id="{BD6F8181-81EF-4A94-9DCA-11478688D978}"/>
               </a:ext>
             </a:extLst>
           </p:cNvPr>
@@ -2922,7 +2922,7 @@
           <p:cNvPr id="11" name="">
             <a:extLst xmlns:a="http://schemas.openxmlformats.org/drawingml/2006/main">
               <a:ext uri="{FF2B5EF4-FFF2-40B4-BE49-F238E27FC236}">
-                <a16:creationId xmlns:a16="http://schemas.microsoft.com/office/drawing/2014/main" id="{856BEC03-B7E5-4145-AC93-7C1CAB13359D}"/>
+                <a16:creationId xmlns:a16="http://schemas.microsoft.com/office/drawing/2014/main" id="{A0BBE749-6C3B-49F7-AF9F-2029F468A90F}"/>
               </a:ext>
             </a:extLst>
           </p:cNvPr>
@@ -2979,7 +2979,7 @@
           <p:cNvPr id="12" name="">
             <a:extLst xmlns:a="http://schemas.openxmlformats.org/drawingml/2006/main">
               <a:ext uri="{FF2B5EF4-FFF2-40B4-BE49-F238E27FC236}">
-                <a16:creationId xmlns:a16="http://schemas.microsoft.com/office/drawing/2014/main" id="{104A0766-446E-44A8-99A4-5CDFDF400EFE}"/>
+                <a16:creationId xmlns:a16="http://schemas.microsoft.com/office/drawing/2014/main" id="{070485AC-DC16-4FA1-A91F-34353F051E13}"/>
               </a:ext>
             </a:extLst>
           </p:cNvPr>
@@ -3036,7 +3036,7 @@
           <p:cNvPr id="13" name="">
             <a:extLst xmlns:a="http://schemas.openxmlformats.org/drawingml/2006/main">
               <a:ext uri="{FF2B5EF4-FFF2-40B4-BE49-F238E27FC236}">
-                <a16:creationId xmlns:a16="http://schemas.microsoft.com/office/drawing/2014/main" id="{8C94230B-41C0-4DB5-B88E-B114937312E2}"/>
+                <a16:creationId xmlns:a16="http://schemas.microsoft.com/office/drawing/2014/main" id="{5219835B-7B11-424C-808C-F2992B6279A5}"/>
               </a:ext>
             </a:extLst>
           </p:cNvPr>
@@ -3091,7 +3091,7 @@
     </p:spTree>
     <p:extLst>
       <p:ext uri="{BB962C8B-B14F-4D97-AF65-F5344CB8AC3E}">
-        <p14:creationId xmlns:p14="http://schemas.microsoft.com/office/powerpoint/2010/main" val="1652923195"/>
+        <p14:creationId xmlns:p14="http://schemas.microsoft.com/office/powerpoint/2010/main" val="1472855028"/>
       </p:ext>
     </p:extLst>
   </p:cSld>
@@ -3292,7 +3292,7 @@
           <p:cNvPr id="19" name="">
             <a:extLst xmlns:a="http://schemas.openxmlformats.org/drawingml/2006/main">
               <a:ext uri="{FF2B5EF4-FFF2-40B4-BE49-F238E27FC236}">
-                <a16:creationId xmlns:a16="http://schemas.microsoft.com/office/drawing/2014/main" id="{6301B2B0-CB95-497C-87C1-FE550691776C}"/>
+                <a16:creationId xmlns:a16="http://schemas.microsoft.com/office/drawing/2014/main" id="{4AD24F2D-A9D7-4274-A1AD-8193B3DB775B}"/>
               </a:ext>
             </a:extLst>
           </p:cNvPr>
@@ -3324,7 +3324,7 @@
           <p:cNvPr id="2" name="">
             <a:extLst xmlns:a="http://schemas.openxmlformats.org/drawingml/2006/main">
               <a:ext uri="{FF2B5EF4-FFF2-40B4-BE49-F238E27FC236}">
-                <a16:creationId xmlns:a16="http://schemas.microsoft.com/office/drawing/2014/main" id="{D0ABC92E-FF67-4A6D-A5A3-FDE4281CE189}"/>
+                <a16:creationId xmlns:a16="http://schemas.microsoft.com/office/drawing/2014/main" id="{0DB88D4D-BCCA-48B9-96D2-89133980ADEF}"/>
               </a:ext>
             </a:extLst>
           </p:cNvPr>
@@ -3381,7 +3381,7 @@
           <p:cNvPr id="3" name="">
             <a:extLst xmlns:a="http://schemas.openxmlformats.org/drawingml/2006/main">
               <a:ext uri="{FF2B5EF4-FFF2-40B4-BE49-F238E27FC236}">
-                <a16:creationId xmlns:a16="http://schemas.microsoft.com/office/drawing/2014/main" id="{BA03037E-DF88-41AB-BFB8-4C2887CB6E6D}"/>
+                <a16:creationId xmlns:a16="http://schemas.microsoft.com/office/drawing/2014/main" id="{B3A5C28E-50AF-488C-A902-B6D88BE3A54C}"/>
               </a:ext>
             </a:extLst>
           </p:cNvPr>
@@ -3413,7 +3413,7 @@
           <p:cNvPr id="4" name="">
             <a:extLst xmlns:a="http://schemas.openxmlformats.org/drawingml/2006/main">
               <a:ext uri="{FF2B5EF4-FFF2-40B4-BE49-F238E27FC236}">
-                <a16:creationId xmlns:a16="http://schemas.microsoft.com/office/drawing/2014/main" id="{93E5963F-7829-4BE3-8730-E96CA38DBDF4}"/>
+                <a16:creationId xmlns:a16="http://schemas.microsoft.com/office/drawing/2014/main" id="{6A866279-8ACB-4CE2-AEBB-83585146659E}"/>
               </a:ext>
             </a:extLst>
           </p:cNvPr>
@@ -3470,7 +3470,7 @@
           <p:cNvPr id="5" name="">
             <a:extLst xmlns:a="http://schemas.openxmlformats.org/drawingml/2006/main">
               <a:ext uri="{FF2B5EF4-FFF2-40B4-BE49-F238E27FC236}">
-                <a16:creationId xmlns:a16="http://schemas.microsoft.com/office/drawing/2014/main" id="{D392EBCD-CD6C-4608-AD03-B42EB59F827E}"/>
+                <a16:creationId xmlns:a16="http://schemas.microsoft.com/office/drawing/2014/main" id="{80BDC2A6-98C1-414F-88AA-6318E5FCFD80}"/>
               </a:ext>
             </a:extLst>
           </p:cNvPr>
@@ -3527,7 +3527,7 @@
           <p:cNvPr id="6" name="">
             <a:extLst xmlns:a="http://schemas.openxmlformats.org/drawingml/2006/main">
               <a:ext uri="{FF2B5EF4-FFF2-40B4-BE49-F238E27FC236}">
-                <a16:creationId xmlns:a16="http://schemas.microsoft.com/office/drawing/2014/main" id="{9E77E340-3336-45C6-A0CC-BAE2BC5AA713}"/>
+                <a16:creationId xmlns:a16="http://schemas.microsoft.com/office/drawing/2014/main" id="{A5FC87E7-E59A-4BE9-9DC3-F7E9EEEA5BA1}"/>
               </a:ext>
             </a:extLst>
           </p:cNvPr>
@@ -3584,7 +3584,7 @@
           <p:cNvPr id="7" name="">
             <a:extLst xmlns:a="http://schemas.openxmlformats.org/drawingml/2006/main">
               <a:ext uri="{FF2B5EF4-FFF2-40B4-BE49-F238E27FC236}">
-                <a16:creationId xmlns:a16="http://schemas.microsoft.com/office/drawing/2014/main" id="{08850008-215E-4CEB-A711-8D44CAB4BBC8}"/>
+                <a16:creationId xmlns:a16="http://schemas.microsoft.com/office/drawing/2014/main" id="{8DB07FD2-F8CC-4203-A026-24FA6A853306}"/>
               </a:ext>
             </a:extLst>
           </p:cNvPr>
@@ -3616,7 +3616,7 @@
           <p:cNvPr id="8" name="">
             <a:extLst xmlns:a="http://schemas.openxmlformats.org/drawingml/2006/main">
               <a:ext uri="{FF2B5EF4-FFF2-40B4-BE49-F238E27FC236}">
-                <a16:creationId xmlns:a16="http://schemas.microsoft.com/office/drawing/2014/main" id="{C0B9939D-A54F-4FD1-96BF-A61E565AA31F}"/>
+                <a16:creationId xmlns:a16="http://schemas.microsoft.com/office/drawing/2014/main" id="{9AADE4D4-4FB5-46A3-9271-FB255C68150D}"/>
               </a:ext>
             </a:extLst>
           </p:cNvPr>
@@ -3673,7 +3673,7 @@
           <p:cNvPr id="9" name="">
             <a:extLst xmlns:a="http://schemas.openxmlformats.org/drawingml/2006/main">
               <a:ext uri="{FF2B5EF4-FFF2-40B4-BE49-F238E27FC236}">
-                <a16:creationId xmlns:a16="http://schemas.microsoft.com/office/drawing/2014/main" id="{193C4EA5-A7AD-4DF2-8F8E-DA72A896F6AF}"/>
+                <a16:creationId xmlns:a16="http://schemas.microsoft.com/office/drawing/2014/main" id="{D78E8AC5-725D-467B-92C2-1C281647844B}"/>
               </a:ext>
             </a:extLst>
           </p:cNvPr>
@@ -3730,7 +3730,7 @@
           <p:cNvPr id="10" name="">
             <a:extLst xmlns:a="http://schemas.openxmlformats.org/drawingml/2006/main">
               <a:ext uri="{FF2B5EF4-FFF2-40B4-BE49-F238E27FC236}">
-                <a16:creationId xmlns:a16="http://schemas.microsoft.com/office/drawing/2014/main" id="{CCD8642C-63D0-4388-88CD-295DA5FFEF49}"/>
+                <a16:creationId xmlns:a16="http://schemas.microsoft.com/office/drawing/2014/main" id="{AD005E1B-DE39-43B2-856F-CF7FC0B02B64}"/>
               </a:ext>
             </a:extLst>
           </p:cNvPr>
@@ -3787,7 +3787,7 @@
           <p:cNvPr id="11" name="">
             <a:extLst xmlns:a="http://schemas.openxmlformats.org/drawingml/2006/main">
               <a:ext uri="{FF2B5EF4-FFF2-40B4-BE49-F238E27FC236}">
-                <a16:creationId xmlns:a16="http://schemas.microsoft.com/office/drawing/2014/main" id="{E0686DC9-AC9C-4EFC-B2CC-69392DD584C2}"/>
+                <a16:creationId xmlns:a16="http://schemas.microsoft.com/office/drawing/2014/main" id="{D6231908-9CCE-4726-9038-A2B04465FA73}"/>
               </a:ext>
             </a:extLst>
           </p:cNvPr>
@@ -3821,7 +3821,7 @@
           <p:cNvPr id="12" name="">
             <a:extLst xmlns:a="http://schemas.openxmlformats.org/drawingml/2006/main">
               <a:ext uri="{FF2B5EF4-FFF2-40B4-BE49-F238E27FC236}">
-                <a16:creationId xmlns:a16="http://schemas.microsoft.com/office/drawing/2014/main" id="{49EFC1AF-90FB-4B74-BCE6-E0F755BCD691}"/>
+                <a16:creationId xmlns:a16="http://schemas.microsoft.com/office/drawing/2014/main" id="{609E1C00-6421-4BB8-8428-F5AA259E7105}"/>
               </a:ext>
             </a:extLst>
           </p:cNvPr>
@@ -3878,7 +3878,7 @@
           <p:cNvPr id="13" name="">
             <a:extLst xmlns:a="http://schemas.openxmlformats.org/drawingml/2006/main">
               <a:ext uri="{FF2B5EF4-FFF2-40B4-BE49-F238E27FC236}">
-                <a16:creationId xmlns:a16="http://schemas.microsoft.com/office/drawing/2014/main" id="{6E2BF649-8413-43B8-8FB0-86DF09917C8B}"/>
+                <a16:creationId xmlns:a16="http://schemas.microsoft.com/office/drawing/2014/main" id="{707A6FC9-8BAC-4E2A-A4C1-080DD1EF6FB6}"/>
               </a:ext>
             </a:extLst>
           </p:cNvPr>
@@ -3935,7 +3935,7 @@
           <p:cNvPr id="14" name="">
             <a:extLst xmlns:a="http://schemas.openxmlformats.org/drawingml/2006/main">
               <a:ext uri="{FF2B5EF4-FFF2-40B4-BE49-F238E27FC236}">
-                <a16:creationId xmlns:a16="http://schemas.microsoft.com/office/drawing/2014/main" id="{AB4E7E9F-0005-4242-9382-AE80103394B2}"/>
+                <a16:creationId xmlns:a16="http://schemas.microsoft.com/office/drawing/2014/main" id="{63F74515-E520-41CB-9784-C2DABF282C53}"/>
               </a:ext>
             </a:extLst>
           </p:cNvPr>
@@ -3992,7 +3992,7 @@
           <p:cNvPr id="15" name="">
             <a:extLst xmlns:a="http://schemas.openxmlformats.org/drawingml/2006/main">
               <a:ext uri="{FF2B5EF4-FFF2-40B4-BE49-F238E27FC236}">
-                <a16:creationId xmlns:a16="http://schemas.microsoft.com/office/drawing/2014/main" id="{F1722DE2-E7D7-4187-B037-DBA94203C0A6}"/>
+                <a16:creationId xmlns:a16="http://schemas.microsoft.com/office/drawing/2014/main" id="{C09514D7-5376-420B-B8AA-AB22AE567324}"/>
               </a:ext>
             </a:extLst>
           </p:cNvPr>
@@ -4026,7 +4026,7 @@
           <p:cNvPr id="16" name="">
             <a:extLst xmlns:a="http://schemas.openxmlformats.org/drawingml/2006/main">
               <a:ext uri="{FF2B5EF4-FFF2-40B4-BE49-F238E27FC236}">
-                <a16:creationId xmlns:a16="http://schemas.microsoft.com/office/drawing/2014/main" id="{85F788C2-4873-445D-8A89-DB5E8B518B45}"/>
+                <a16:creationId xmlns:a16="http://schemas.microsoft.com/office/drawing/2014/main" id="{6286771F-9B9B-4E6C-A331-9418144EF13A}"/>
               </a:ext>
             </a:extLst>
           </p:cNvPr>
@@ -4083,7 +4083,7 @@
           <p:cNvPr id="17" name="">
             <a:extLst xmlns:a="http://schemas.openxmlformats.org/drawingml/2006/main">
               <a:ext uri="{FF2B5EF4-FFF2-40B4-BE49-F238E27FC236}">
-                <a16:creationId xmlns:a16="http://schemas.microsoft.com/office/drawing/2014/main" id="{3F39B5AC-2E0F-4EAA-A269-C3876D569043}"/>
+                <a16:creationId xmlns:a16="http://schemas.microsoft.com/office/drawing/2014/main" id="{32EE6951-61E3-4437-A283-4183D3D61C6D}"/>
               </a:ext>
             </a:extLst>
           </p:cNvPr>
@@ -4140,7 +4140,7 @@
           <p:cNvPr id="18" name="">
             <a:extLst xmlns:a="http://schemas.openxmlformats.org/drawingml/2006/main">
               <a:ext uri="{FF2B5EF4-FFF2-40B4-BE49-F238E27FC236}">
-                <a16:creationId xmlns:a16="http://schemas.microsoft.com/office/drawing/2014/main" id="{EAD033C5-36A9-411E-A0A9-298653FF8E10}"/>
+                <a16:creationId xmlns:a16="http://schemas.microsoft.com/office/drawing/2014/main" id="{AC37240B-E7D5-4956-8BE0-A86ACB4BE7AA}"/>
               </a:ext>
             </a:extLst>
           </p:cNvPr>
@@ -4195,7 +4195,7 @@
     </p:spTree>
     <p:extLst>
       <p:ext uri="{BB962C8B-B14F-4D97-AF65-F5344CB8AC3E}">
-        <p14:creationId xmlns:p14="http://schemas.microsoft.com/office/powerpoint/2010/main" val="488400338"/>
+        <p14:creationId xmlns:p14="http://schemas.microsoft.com/office/powerpoint/2010/main" val="2008685488"/>
       </p:ext>
     </p:extLst>
   </p:cSld>
@@ -4350,7 +4350,7 @@
           <p:cNvPr id="23" name="">
             <a:extLst xmlns:a="http://schemas.openxmlformats.org/drawingml/2006/main">
               <a:ext uri="{FF2B5EF4-FFF2-40B4-BE49-F238E27FC236}">
-                <a16:creationId xmlns:a16="http://schemas.microsoft.com/office/drawing/2014/main" id="{722A2218-D10D-4CC2-A3DB-BF96816FD3E8}"/>
+                <a16:creationId xmlns:a16="http://schemas.microsoft.com/office/drawing/2014/main" id="{77E16384-1F42-4C53-AE06-C5B3CE174639}"/>
               </a:ext>
             </a:extLst>
           </p:cNvPr>
@@ -4382,7 +4382,7 @@
           <p:cNvPr id="2" name="">
             <a:extLst xmlns:a="http://schemas.openxmlformats.org/drawingml/2006/main">
               <a:ext uri="{FF2B5EF4-FFF2-40B4-BE49-F238E27FC236}">
-                <a16:creationId xmlns:a16="http://schemas.microsoft.com/office/drawing/2014/main" id="{19C272F5-A8D4-40D5-8DDC-71DC9939059C}"/>
+                <a16:creationId xmlns:a16="http://schemas.microsoft.com/office/drawing/2014/main" id="{66B2679F-731D-4E2A-AEF6-CDAC09833814}"/>
               </a:ext>
             </a:extLst>
           </p:cNvPr>
@@ -4439,7 +4439,7 @@
           <p:cNvPr id="3" name="">
             <a:extLst xmlns:a="http://schemas.openxmlformats.org/drawingml/2006/main">
               <a:ext uri="{FF2B5EF4-FFF2-40B4-BE49-F238E27FC236}">
-                <a16:creationId xmlns:a16="http://schemas.microsoft.com/office/drawing/2014/main" id="{EE41E0BC-766C-43AA-836C-429C70D02ADA}"/>
+                <a16:creationId xmlns:a16="http://schemas.microsoft.com/office/drawing/2014/main" id="{F65B8CD3-A746-4D6B-B195-8BCBA0CEDDE3}"/>
               </a:ext>
             </a:extLst>
           </p:cNvPr>
@@ -4471,7 +4471,7 @@
           <p:cNvPr id="4" name="">
             <a:extLst xmlns:a="http://schemas.openxmlformats.org/drawingml/2006/main">
               <a:ext uri="{FF2B5EF4-FFF2-40B4-BE49-F238E27FC236}">
-                <a16:creationId xmlns:a16="http://schemas.microsoft.com/office/drawing/2014/main" id="{50187194-66EF-44E9-B465-7F65CF5148CC}"/>
+                <a16:creationId xmlns:a16="http://schemas.microsoft.com/office/drawing/2014/main" id="{3E14E2F4-A443-4C37-80EB-A76DDB9A4728}"/>
               </a:ext>
             </a:extLst>
           </p:cNvPr>
@@ -4528,7 +4528,7 @@
           <p:cNvPr id="5" name="">
             <a:extLst xmlns:a="http://schemas.openxmlformats.org/drawingml/2006/main">
               <a:ext uri="{FF2B5EF4-FFF2-40B4-BE49-F238E27FC236}">
-                <a16:creationId xmlns:a16="http://schemas.microsoft.com/office/drawing/2014/main" id="{58E4A4ED-A927-43C3-B05E-1C9068F816DC}"/>
+                <a16:creationId xmlns:a16="http://schemas.microsoft.com/office/drawing/2014/main" id="{D6A8A881-60D5-4657-BE83-22D8AC1C9FEE}"/>
               </a:ext>
             </a:extLst>
           </p:cNvPr>
@@ -4585,7 +4585,7 @@
           <p:cNvPr id="6" name="">
             <a:extLst xmlns:a="http://schemas.openxmlformats.org/drawingml/2006/main">
               <a:ext uri="{FF2B5EF4-FFF2-40B4-BE49-F238E27FC236}">
-                <a16:creationId xmlns:a16="http://schemas.microsoft.com/office/drawing/2014/main" id="{A6CAFCD4-EB63-452D-961B-91FB2474775F}"/>
+                <a16:creationId xmlns:a16="http://schemas.microsoft.com/office/drawing/2014/main" id="{3B756F07-017B-4A0D-ADCC-4AE613C3F38F}"/>
               </a:ext>
             </a:extLst>
           </p:cNvPr>
@@ -4642,7 +4642,7 @@
           <p:cNvPr id="7" name="">
             <a:extLst xmlns:a="http://schemas.openxmlformats.org/drawingml/2006/main">
               <a:ext uri="{FF2B5EF4-FFF2-40B4-BE49-F238E27FC236}">
-                <a16:creationId xmlns:a16="http://schemas.microsoft.com/office/drawing/2014/main" id="{B1B46FC9-F874-4FBC-AA30-90F242F07C81}"/>
+                <a16:creationId xmlns:a16="http://schemas.microsoft.com/office/drawing/2014/main" id="{7B2D7771-0D31-4399-9E09-EBF592A24AB5}"/>
               </a:ext>
             </a:extLst>
           </p:cNvPr>
@@ -4674,7 +4674,7 @@
           <p:cNvPr id="8" name="">
             <a:extLst xmlns:a="http://schemas.openxmlformats.org/drawingml/2006/main">
               <a:ext uri="{FF2B5EF4-FFF2-40B4-BE49-F238E27FC236}">
-                <a16:creationId xmlns:a16="http://schemas.microsoft.com/office/drawing/2014/main" id="{89E98AA0-96D1-40CD-9950-D903C2A37818}"/>
+                <a16:creationId xmlns:a16="http://schemas.microsoft.com/office/drawing/2014/main" id="{9AA04932-26C3-4F18-9392-80CDF8D10184}"/>
               </a:ext>
             </a:extLst>
           </p:cNvPr>
@@ -4731,7 +4731,7 @@
           <p:cNvPr id="9" name="">
             <a:extLst xmlns:a="http://schemas.openxmlformats.org/drawingml/2006/main">
               <a:ext uri="{FF2B5EF4-FFF2-40B4-BE49-F238E27FC236}">
-                <a16:creationId xmlns:a16="http://schemas.microsoft.com/office/drawing/2014/main" id="{078B253F-B6BA-4C18-9187-17DAA2D0BCA5}"/>
+                <a16:creationId xmlns:a16="http://schemas.microsoft.com/office/drawing/2014/main" id="{398EF3F8-BA53-4A9E-9982-A16CDCA7EEDC}"/>
               </a:ext>
             </a:extLst>
           </p:cNvPr>
@@ -4788,7 +4788,7 @@
           <p:cNvPr id="10" name="">
             <a:extLst xmlns:a="http://schemas.openxmlformats.org/drawingml/2006/main">
               <a:ext uri="{FF2B5EF4-FFF2-40B4-BE49-F238E27FC236}">
-                <a16:creationId xmlns:a16="http://schemas.microsoft.com/office/drawing/2014/main" id="{F6B5C3C5-5028-4724-B674-E7D824704035}"/>
+                <a16:creationId xmlns:a16="http://schemas.microsoft.com/office/drawing/2014/main" id="{2997B997-21E2-40E5-9CDD-DF1495E2FC18}"/>
               </a:ext>
             </a:extLst>
           </p:cNvPr>
@@ -4822,7 +4822,7 @@
           <p:cNvPr id="11" name="">
             <a:extLst xmlns:a="http://schemas.openxmlformats.org/drawingml/2006/main">
               <a:ext uri="{FF2B5EF4-FFF2-40B4-BE49-F238E27FC236}">
-                <a16:creationId xmlns:a16="http://schemas.microsoft.com/office/drawing/2014/main" id="{25F265EF-6BB3-4DF1-8790-7787E791047C}"/>
+                <a16:creationId xmlns:a16="http://schemas.microsoft.com/office/drawing/2014/main" id="{A15EC538-5B4E-4924-8AB3-225C19BAC747}"/>
               </a:ext>
             </a:extLst>
           </p:cNvPr>
@@ -4854,7 +4854,7 @@
           <p:cNvPr id="12" name="">
             <a:extLst xmlns:a="http://schemas.openxmlformats.org/drawingml/2006/main">
               <a:ext uri="{FF2B5EF4-FFF2-40B4-BE49-F238E27FC236}">
-                <a16:creationId xmlns:a16="http://schemas.microsoft.com/office/drawing/2014/main" id="{DF3F50D8-8906-4139-845B-41E483577DE8}"/>
+                <a16:creationId xmlns:a16="http://schemas.microsoft.com/office/drawing/2014/main" id="{5D0C458D-324F-4A17-ACA9-3A5F722E0A26}"/>
               </a:ext>
             </a:extLst>
           </p:cNvPr>
@@ -4911,7 +4911,7 @@
           <p:cNvPr id="13" name="">
             <a:extLst xmlns:a="http://schemas.openxmlformats.org/drawingml/2006/main">
               <a:ext uri="{FF2B5EF4-FFF2-40B4-BE49-F238E27FC236}">
-                <a16:creationId xmlns:a16="http://schemas.microsoft.com/office/drawing/2014/main" id="{C1D55D91-958E-4A5C-B350-18B751B51B67}"/>
+                <a16:creationId xmlns:a16="http://schemas.microsoft.com/office/drawing/2014/main" id="{305F9A13-D642-49FF-9DC8-BE6C32FF391D}"/>
               </a:ext>
             </a:extLst>
           </p:cNvPr>
@@ -4968,7 +4968,7 @@
           <p:cNvPr id="14" name="">
             <a:extLst xmlns:a="http://schemas.openxmlformats.org/drawingml/2006/main">
               <a:ext uri="{FF2B5EF4-FFF2-40B4-BE49-F238E27FC236}">
-                <a16:creationId xmlns:a16="http://schemas.microsoft.com/office/drawing/2014/main" id="{D0AA1926-ED3A-439F-94CE-C9E6A6BCF8A8}"/>
+                <a16:creationId xmlns:a16="http://schemas.microsoft.com/office/drawing/2014/main" id="{492C80A7-EA6A-458F-9A20-2460C8BC5AA3}"/>
               </a:ext>
             </a:extLst>
           </p:cNvPr>
@@ -5002,7 +5002,7 @@
           <p:cNvPr id="15" name="">
             <a:extLst xmlns:a="http://schemas.openxmlformats.org/drawingml/2006/main">
               <a:ext uri="{FF2B5EF4-FFF2-40B4-BE49-F238E27FC236}">
-                <a16:creationId xmlns:a16="http://schemas.microsoft.com/office/drawing/2014/main" id="{E643F226-F9E5-41C3-ABBC-E7503512A731}"/>
+                <a16:creationId xmlns:a16="http://schemas.microsoft.com/office/drawing/2014/main" id="{5C7F175A-634D-4419-943F-3B18A83E1BCE}"/>
               </a:ext>
             </a:extLst>
           </p:cNvPr>
@@ -5034,7 +5034,7 @@
           <p:cNvPr id="16" name="">
             <a:extLst xmlns:a="http://schemas.openxmlformats.org/drawingml/2006/main">
               <a:ext uri="{FF2B5EF4-FFF2-40B4-BE49-F238E27FC236}">
-                <a16:creationId xmlns:a16="http://schemas.microsoft.com/office/drawing/2014/main" id="{FA366EBC-48ED-49BC-BB2C-3E24C5D08E8B}"/>
+                <a16:creationId xmlns:a16="http://schemas.microsoft.com/office/drawing/2014/main" id="{993147D6-7B5B-4496-B166-44C5A7A1B307}"/>
               </a:ext>
             </a:extLst>
           </p:cNvPr>
@@ -5091,7 +5091,7 @@
           <p:cNvPr id="17" name="">
             <a:extLst xmlns:a="http://schemas.openxmlformats.org/drawingml/2006/main">
               <a:ext uri="{FF2B5EF4-FFF2-40B4-BE49-F238E27FC236}">
-                <a16:creationId xmlns:a16="http://schemas.microsoft.com/office/drawing/2014/main" id="{C1879C9D-CC70-4082-BD4C-8130A29B18BE}"/>
+                <a16:creationId xmlns:a16="http://schemas.microsoft.com/office/drawing/2014/main" id="{2449D311-A584-437A-9332-9118B5710574}"/>
               </a:ext>
             </a:extLst>
           </p:cNvPr>
@@ -5148,7 +5148,7 @@
           <p:cNvPr id="18" name="">
             <a:extLst xmlns:a="http://schemas.openxmlformats.org/drawingml/2006/main">
               <a:ext uri="{FF2B5EF4-FFF2-40B4-BE49-F238E27FC236}">
-                <a16:creationId xmlns:a16="http://schemas.microsoft.com/office/drawing/2014/main" id="{5848F489-2891-4B5C-9D8A-F88C483E232C}"/>
+                <a16:creationId xmlns:a16="http://schemas.microsoft.com/office/drawing/2014/main" id="{26E0245A-0A32-4875-B63B-63875E3A44D5}"/>
               </a:ext>
             </a:extLst>
           </p:cNvPr>
@@ -5182,7 +5182,7 @@
           <p:cNvPr id="19" name="">
             <a:extLst xmlns:a="http://schemas.openxmlformats.org/drawingml/2006/main">
               <a:ext uri="{FF2B5EF4-FFF2-40B4-BE49-F238E27FC236}">
-                <a16:creationId xmlns:a16="http://schemas.microsoft.com/office/drawing/2014/main" id="{0D5A6305-3D70-494D-A08E-43222D1FE634}"/>
+                <a16:creationId xmlns:a16="http://schemas.microsoft.com/office/drawing/2014/main" id="{78E2CFB0-6227-4A10-9A68-33734E60E9D6}"/>
               </a:ext>
             </a:extLst>
           </p:cNvPr>
@@ -5214,7 +5214,7 @@
           <p:cNvPr id="20" name="">
             <a:extLst xmlns:a="http://schemas.openxmlformats.org/drawingml/2006/main">
               <a:ext uri="{FF2B5EF4-FFF2-40B4-BE49-F238E27FC236}">
-                <a16:creationId xmlns:a16="http://schemas.microsoft.com/office/drawing/2014/main" id="{AA7CCE73-8CED-4BD4-99F3-6FF9157FBCBE}"/>
+                <a16:creationId xmlns:a16="http://schemas.microsoft.com/office/drawing/2014/main" id="{71B5DAFE-FEC5-4EA1-A920-10B7BD7BD7F0}"/>
               </a:ext>
             </a:extLst>
           </p:cNvPr>
@@ -5271,7 +5271,7 @@
           <p:cNvPr id="21" name="">
             <a:extLst xmlns:a="http://schemas.openxmlformats.org/drawingml/2006/main">
               <a:ext uri="{FF2B5EF4-FFF2-40B4-BE49-F238E27FC236}">
-                <a16:creationId xmlns:a16="http://schemas.microsoft.com/office/drawing/2014/main" id="{107E0F24-88FA-4C5C-9E73-1B156C878DC6}"/>
+                <a16:creationId xmlns:a16="http://schemas.microsoft.com/office/drawing/2014/main" id="{55618440-6A2C-4BB5-B83B-E806EE9908A4}"/>
               </a:ext>
             </a:extLst>
           </p:cNvPr>
@@ -5328,7 +5328,7 @@
           <p:cNvPr id="22" name="">
             <a:extLst xmlns:a="http://schemas.openxmlformats.org/drawingml/2006/main">
               <a:ext uri="{FF2B5EF4-FFF2-40B4-BE49-F238E27FC236}">
-                <a16:creationId xmlns:a16="http://schemas.microsoft.com/office/drawing/2014/main" id="{EDA9A8B1-B4C2-4993-8B20-126F74D17CCF}"/>
+                <a16:creationId xmlns:a16="http://schemas.microsoft.com/office/drawing/2014/main" id="{05F4B4EA-2592-42E1-B677-7DD309A6846A}"/>
               </a:ext>
             </a:extLst>
           </p:cNvPr>
@@ -5383,7 +5383,7 @@
     </p:spTree>
     <p:extLst>
       <p:ext uri="{BB962C8B-B14F-4D97-AF65-F5344CB8AC3E}">
-        <p14:creationId xmlns:p14="http://schemas.microsoft.com/office/powerpoint/2010/main" val="1806555687"/>
+        <p14:creationId xmlns:p14="http://schemas.microsoft.com/office/powerpoint/2010/main" val="2025824176"/>
       </p:ext>
     </p:extLst>
   </p:cSld>
@@ -5584,7 +5584,7 @@
           <p:cNvPr id="23" name="">
             <a:extLst xmlns:a="http://schemas.openxmlformats.org/drawingml/2006/main">
               <a:ext uri="{FF2B5EF4-FFF2-40B4-BE49-F238E27FC236}">
-                <a16:creationId xmlns:a16="http://schemas.microsoft.com/office/drawing/2014/main" id="{EA6ACD66-5262-4B3D-BC2D-A697349091FC}"/>
+                <a16:creationId xmlns:a16="http://schemas.microsoft.com/office/drawing/2014/main" id="{E96FABB9-3E1C-4546-AA0C-84BBDCC9F382}"/>
               </a:ext>
             </a:extLst>
           </p:cNvPr>
@@ -5616,7 +5616,7 @@
           <p:cNvPr id="2" name="">
             <a:extLst xmlns:a="http://schemas.openxmlformats.org/drawingml/2006/main">
               <a:ext uri="{FF2B5EF4-FFF2-40B4-BE49-F238E27FC236}">
-                <a16:creationId xmlns:a16="http://schemas.microsoft.com/office/drawing/2014/main" id="{857708B0-6427-4D21-ABF8-B7B794541A45}"/>
+                <a16:creationId xmlns:a16="http://schemas.microsoft.com/office/drawing/2014/main" id="{18E68863-B59B-4B32-A69B-8A1D1607F5DB}"/>
               </a:ext>
             </a:extLst>
           </p:cNvPr>
@@ -5673,7 +5673,7 @@
           <p:cNvPr id="3" name="">
             <a:extLst xmlns:a="http://schemas.openxmlformats.org/drawingml/2006/main">
               <a:ext uri="{FF2B5EF4-FFF2-40B4-BE49-F238E27FC236}">
-                <a16:creationId xmlns:a16="http://schemas.microsoft.com/office/drawing/2014/main" id="{ABBAF86B-D9FA-4845-A674-044224342014}"/>
+                <a16:creationId xmlns:a16="http://schemas.microsoft.com/office/drawing/2014/main" id="{188A0BAC-D241-49EA-82F0-23E649E5B460}"/>
               </a:ext>
             </a:extLst>
           </p:cNvPr>
@@ -5705,7 +5705,7 @@
           <p:cNvPr id="4" name="">
             <a:extLst xmlns:a="http://schemas.openxmlformats.org/drawingml/2006/main">
               <a:ext uri="{FF2B5EF4-FFF2-40B4-BE49-F238E27FC236}">
-                <a16:creationId xmlns:a16="http://schemas.microsoft.com/office/drawing/2014/main" id="{8FCA4535-D3D9-4958-8164-6A35D3CDE457}"/>
+                <a16:creationId xmlns:a16="http://schemas.microsoft.com/office/drawing/2014/main" id="{CAB5F824-CE6E-4C84-BB8C-1F7347BF22CC}"/>
               </a:ext>
             </a:extLst>
           </p:cNvPr>
@@ -5762,7 +5762,7 @@
           <p:cNvPr id="5" name="">
             <a:extLst xmlns:a="http://schemas.openxmlformats.org/drawingml/2006/main">
               <a:ext uri="{FF2B5EF4-FFF2-40B4-BE49-F238E27FC236}">
-                <a16:creationId xmlns:a16="http://schemas.microsoft.com/office/drawing/2014/main" id="{4429F457-D867-4BCC-8862-E326FF658733}"/>
+                <a16:creationId xmlns:a16="http://schemas.microsoft.com/office/drawing/2014/main" id="{3F175916-CCC1-44E8-B303-D2CA44A1A8B9}"/>
               </a:ext>
             </a:extLst>
           </p:cNvPr>
@@ -5819,7 +5819,7 @@
           <p:cNvPr id="6" name="">
             <a:extLst xmlns:a="http://schemas.openxmlformats.org/drawingml/2006/main">
               <a:ext uri="{FF2B5EF4-FFF2-40B4-BE49-F238E27FC236}">
-                <a16:creationId xmlns:a16="http://schemas.microsoft.com/office/drawing/2014/main" id="{0E4FD62E-5873-48D4-8C84-C414F536A3ED}"/>
+                <a16:creationId xmlns:a16="http://schemas.microsoft.com/office/drawing/2014/main" id="{0E989EC5-E65C-42F3-A53D-D01BB2D1619F}"/>
               </a:ext>
             </a:extLst>
           </p:cNvPr>
@@ -5876,7 +5876,7 @@
           <p:cNvPr id="7" name="">
             <a:extLst xmlns:a="http://schemas.openxmlformats.org/drawingml/2006/main">
               <a:ext uri="{FF2B5EF4-FFF2-40B4-BE49-F238E27FC236}">
-                <a16:creationId xmlns:a16="http://schemas.microsoft.com/office/drawing/2014/main" id="{B270A0C6-4AEB-4F16-BFCB-8C3A905D4263}"/>
+                <a16:creationId xmlns:a16="http://schemas.microsoft.com/office/drawing/2014/main" id="{EF0E6777-C9F8-435D-B2CB-294EBEE01EA7}"/>
               </a:ext>
             </a:extLst>
           </p:cNvPr>
@@ -5908,7 +5908,7 @@
           <p:cNvPr id="8" name="">
             <a:extLst xmlns:a="http://schemas.openxmlformats.org/drawingml/2006/main">
               <a:ext uri="{FF2B5EF4-FFF2-40B4-BE49-F238E27FC236}">
-                <a16:creationId xmlns:a16="http://schemas.microsoft.com/office/drawing/2014/main" id="{0D97A64A-C17C-4AA3-9B57-FC9B4490575D}"/>
+                <a16:creationId xmlns:a16="http://schemas.microsoft.com/office/drawing/2014/main" id="{D073CA42-C6C2-4CC2-816D-DE99BF72067D}"/>
               </a:ext>
             </a:extLst>
           </p:cNvPr>
@@ -5965,7 +5965,7 @@
           <p:cNvPr id="9" name="">
             <a:extLst xmlns:a="http://schemas.openxmlformats.org/drawingml/2006/main">
               <a:ext uri="{FF2B5EF4-FFF2-40B4-BE49-F238E27FC236}">
-                <a16:creationId xmlns:a16="http://schemas.microsoft.com/office/drawing/2014/main" id="{F48AA709-CAD8-4F65-8BC8-74F54FBB8EF7}"/>
+                <a16:creationId xmlns:a16="http://schemas.microsoft.com/office/drawing/2014/main" id="{DD299446-0FEC-48FA-BB6F-F8EBE4A8A7EF}"/>
               </a:ext>
             </a:extLst>
           </p:cNvPr>
@@ -6022,7 +6022,7 @@
           <p:cNvPr id="10" name="">
             <a:extLst xmlns:a="http://schemas.openxmlformats.org/drawingml/2006/main">
               <a:ext uri="{FF2B5EF4-FFF2-40B4-BE49-F238E27FC236}">
-                <a16:creationId xmlns:a16="http://schemas.microsoft.com/office/drawing/2014/main" id="{9EC75173-5F29-42C7-BDFA-AB535A6DA900}"/>
+                <a16:creationId xmlns:a16="http://schemas.microsoft.com/office/drawing/2014/main" id="{517C0067-E406-4862-B034-030E44F5A08E}"/>
               </a:ext>
             </a:extLst>
           </p:cNvPr>
@@ -6056,7 +6056,7 @@
           <p:cNvPr id="11" name="">
             <a:extLst xmlns:a="http://schemas.openxmlformats.org/drawingml/2006/main">
               <a:ext uri="{FF2B5EF4-FFF2-40B4-BE49-F238E27FC236}">
-                <a16:creationId xmlns:a16="http://schemas.microsoft.com/office/drawing/2014/main" id="{781B1006-B0D2-4FDF-A423-C4000A895EB0}"/>
+                <a16:creationId xmlns:a16="http://schemas.microsoft.com/office/drawing/2014/main" id="{7AAA029C-282B-433E-80FC-8ACA497F4BD1}"/>
               </a:ext>
             </a:extLst>
           </p:cNvPr>
@@ -6088,7 +6088,7 @@
           <p:cNvPr id="12" name="">
             <a:extLst xmlns:a="http://schemas.openxmlformats.org/drawingml/2006/main">
               <a:ext uri="{FF2B5EF4-FFF2-40B4-BE49-F238E27FC236}">
-                <a16:creationId xmlns:a16="http://schemas.microsoft.com/office/drawing/2014/main" id="{08E63936-C1B7-4567-8AF2-A1FC2E1E5B1F}"/>
+                <a16:creationId xmlns:a16="http://schemas.microsoft.com/office/drawing/2014/main" id="{30487055-0082-4C72-8268-BD0C7C22D801}"/>
               </a:ext>
             </a:extLst>
           </p:cNvPr>
@@ -6145,7 +6145,7 @@
           <p:cNvPr id="13" name="">
             <a:extLst xmlns:a="http://schemas.openxmlformats.org/drawingml/2006/main">
               <a:ext uri="{FF2B5EF4-FFF2-40B4-BE49-F238E27FC236}">
-                <a16:creationId xmlns:a16="http://schemas.microsoft.com/office/drawing/2014/main" id="{AFA4F6B4-79EB-4965-B4B8-CE859810E3CB}"/>
+                <a16:creationId xmlns:a16="http://schemas.microsoft.com/office/drawing/2014/main" id="{177AF1E9-89EA-4277-847E-01FE4A54FA2D}"/>
               </a:ext>
             </a:extLst>
           </p:cNvPr>
@@ -6202,7 +6202,7 @@
           <p:cNvPr id="14" name="">
             <a:extLst xmlns:a="http://schemas.openxmlformats.org/drawingml/2006/main">
               <a:ext uri="{FF2B5EF4-FFF2-40B4-BE49-F238E27FC236}">
-                <a16:creationId xmlns:a16="http://schemas.microsoft.com/office/drawing/2014/main" id="{8B2A64FD-13B1-43A1-ACC3-48F009B44A2A}"/>
+                <a16:creationId xmlns:a16="http://schemas.microsoft.com/office/drawing/2014/main" id="{1E0E4434-A62C-43F5-9344-E94163F1322E}"/>
               </a:ext>
             </a:extLst>
           </p:cNvPr>
@@ -6236,7 +6236,7 @@
           <p:cNvPr id="15" name="">
             <a:extLst xmlns:a="http://schemas.openxmlformats.org/drawingml/2006/main">
               <a:ext uri="{FF2B5EF4-FFF2-40B4-BE49-F238E27FC236}">
-                <a16:creationId xmlns:a16="http://schemas.microsoft.com/office/drawing/2014/main" id="{DA920B6A-194C-422C-BA33-1F79E638472C}"/>
+                <a16:creationId xmlns:a16="http://schemas.microsoft.com/office/drawing/2014/main" id="{6985660D-5F7B-4740-A80C-C6D4312DC05D}"/>
               </a:ext>
             </a:extLst>
           </p:cNvPr>
@@ -6268,7 +6268,7 @@
           <p:cNvPr id="16" name="">
             <a:extLst xmlns:a="http://schemas.openxmlformats.org/drawingml/2006/main">
               <a:ext uri="{FF2B5EF4-FFF2-40B4-BE49-F238E27FC236}">
-                <a16:creationId xmlns:a16="http://schemas.microsoft.com/office/drawing/2014/main" id="{BF967D59-1C67-4204-AB3D-037605268B6B}"/>
+                <a16:creationId xmlns:a16="http://schemas.microsoft.com/office/drawing/2014/main" id="{79A2FBE1-BB01-4258-9865-E35F5C7A16BD}"/>
               </a:ext>
             </a:extLst>
           </p:cNvPr>
@@ -6325,7 +6325,7 @@
           <p:cNvPr id="17" name="">
             <a:extLst xmlns:a="http://schemas.openxmlformats.org/drawingml/2006/main">
               <a:ext uri="{FF2B5EF4-FFF2-40B4-BE49-F238E27FC236}">
-                <a16:creationId xmlns:a16="http://schemas.microsoft.com/office/drawing/2014/main" id="{216617E1-8F0C-48F1-8E75-00E8DDC362DD}"/>
+                <a16:creationId xmlns:a16="http://schemas.microsoft.com/office/drawing/2014/main" id="{D3084A6B-A518-431C-A4F2-A03516A9C745}"/>
               </a:ext>
             </a:extLst>
           </p:cNvPr>
@@ -6382,7 +6382,7 @@
           <p:cNvPr id="18" name="">
             <a:extLst xmlns:a="http://schemas.openxmlformats.org/drawingml/2006/main">
               <a:ext uri="{FF2B5EF4-FFF2-40B4-BE49-F238E27FC236}">
-                <a16:creationId xmlns:a16="http://schemas.microsoft.com/office/drawing/2014/main" id="{50870939-3A8C-440E-B4ED-48E53AE83CAF}"/>
+                <a16:creationId xmlns:a16="http://schemas.microsoft.com/office/drawing/2014/main" id="{0C79D07F-A844-4683-9E7D-E86168ADE762}"/>
               </a:ext>
             </a:extLst>
           </p:cNvPr>
@@ -6416,7 +6416,7 @@
           <p:cNvPr id="19" name="">
             <a:extLst xmlns:a="http://schemas.openxmlformats.org/drawingml/2006/main">
               <a:ext uri="{FF2B5EF4-FFF2-40B4-BE49-F238E27FC236}">
-                <a16:creationId xmlns:a16="http://schemas.microsoft.com/office/drawing/2014/main" id="{2C531D8D-F8C3-416A-A8BE-E38CDFF169F3}"/>
+                <a16:creationId xmlns:a16="http://schemas.microsoft.com/office/drawing/2014/main" id="{603FFC56-CF2E-453F-9434-2E64EC3A54B9}"/>
               </a:ext>
             </a:extLst>
           </p:cNvPr>
@@ -6448,7 +6448,7 @@
           <p:cNvPr id="20" name="">
             <a:extLst xmlns:a="http://schemas.openxmlformats.org/drawingml/2006/main">
               <a:ext uri="{FF2B5EF4-FFF2-40B4-BE49-F238E27FC236}">
-                <a16:creationId xmlns:a16="http://schemas.microsoft.com/office/drawing/2014/main" id="{BBEBC428-FF79-4CFA-9AD7-89B50B061D83}"/>
+                <a16:creationId xmlns:a16="http://schemas.microsoft.com/office/drawing/2014/main" id="{B5521F78-23CF-4733-842F-926CF601AD8A}"/>
               </a:ext>
             </a:extLst>
           </p:cNvPr>
@@ -6505,7 +6505,7 @@
           <p:cNvPr id="21" name="">
             <a:extLst xmlns:a="http://schemas.openxmlformats.org/drawingml/2006/main">
               <a:ext uri="{FF2B5EF4-FFF2-40B4-BE49-F238E27FC236}">
-                <a16:creationId xmlns:a16="http://schemas.microsoft.com/office/drawing/2014/main" id="{09A66274-5A16-49E2-85DC-AB603C31E166}"/>
+                <a16:creationId xmlns:a16="http://schemas.microsoft.com/office/drawing/2014/main" id="{D5A32B0B-F4C9-4195-B73E-B4894E24F500}"/>
               </a:ext>
             </a:extLst>
           </p:cNvPr>
@@ -6562,7 +6562,7 @@
           <p:cNvPr id="22" name="">
             <a:extLst xmlns:a="http://schemas.openxmlformats.org/drawingml/2006/main">
               <a:ext uri="{FF2B5EF4-FFF2-40B4-BE49-F238E27FC236}">
-                <a16:creationId xmlns:a16="http://schemas.microsoft.com/office/drawing/2014/main" id="{DF546CEF-1486-4AC7-93DF-7B8E35C28C15}"/>
+                <a16:creationId xmlns:a16="http://schemas.microsoft.com/office/drawing/2014/main" id="{AABE8662-043B-4CA7-8C2A-38473BFB494E}"/>
               </a:ext>
             </a:extLst>
           </p:cNvPr>
@@ -6617,7 +6617,7 @@
     </p:spTree>
     <p:extLst>
       <p:ext uri="{BB962C8B-B14F-4D97-AF65-F5344CB8AC3E}">
-        <p14:creationId xmlns:p14="http://schemas.microsoft.com/office/powerpoint/2010/main" val="931837731"/>
+        <p14:creationId xmlns:p14="http://schemas.microsoft.com/office/powerpoint/2010/main" val="218421230"/>
       </p:ext>
     </p:extLst>
   </p:cSld>
@@ -6818,7 +6818,7 @@
           <p:cNvPr id="16" name="">
             <a:extLst xmlns:a="http://schemas.openxmlformats.org/drawingml/2006/main">
               <a:ext uri="{FF2B5EF4-FFF2-40B4-BE49-F238E27FC236}">
-                <a16:creationId xmlns:a16="http://schemas.microsoft.com/office/drawing/2014/main" id="{D019CD2D-2AEA-46AF-8B02-04EC96DCFF7D}"/>
+                <a16:creationId xmlns:a16="http://schemas.microsoft.com/office/drawing/2014/main" id="{0BDB989D-056D-4776-A0D2-A687681D5893}"/>
               </a:ext>
             </a:extLst>
           </p:cNvPr>
@@ -6850,7 +6850,7 @@
           <p:cNvPr id="2" name="">
             <a:extLst xmlns:a="http://schemas.openxmlformats.org/drawingml/2006/main">
               <a:ext uri="{FF2B5EF4-FFF2-40B4-BE49-F238E27FC236}">
-                <a16:creationId xmlns:a16="http://schemas.microsoft.com/office/drawing/2014/main" id="{431E12E7-CA6E-4C45-B83B-339E28A6247D}"/>
+                <a16:creationId xmlns:a16="http://schemas.microsoft.com/office/drawing/2014/main" id="{8AECF4AD-D261-4845-BB7D-83B98A3931E9}"/>
               </a:ext>
             </a:extLst>
           </p:cNvPr>
@@ -6907,7 +6907,7 @@
           <p:cNvPr id="3" name="">
             <a:extLst xmlns:a="http://schemas.openxmlformats.org/drawingml/2006/main">
               <a:ext uri="{FF2B5EF4-FFF2-40B4-BE49-F238E27FC236}">
-                <a16:creationId xmlns:a16="http://schemas.microsoft.com/office/drawing/2014/main" id="{E7E3DAC4-DAA2-409F-B3B5-CE9CF75C5FD4}"/>
+                <a16:creationId xmlns:a16="http://schemas.microsoft.com/office/drawing/2014/main" id="{15E11137-7E21-4966-8F76-D654C5DB942F}"/>
               </a:ext>
             </a:extLst>
           </p:cNvPr>
@@ -6939,7 +6939,7 @@
           <p:cNvPr id="4" name="">
             <a:extLst xmlns:a="http://schemas.openxmlformats.org/drawingml/2006/main">
               <a:ext uri="{FF2B5EF4-FFF2-40B4-BE49-F238E27FC236}">
-                <a16:creationId xmlns:a16="http://schemas.microsoft.com/office/drawing/2014/main" id="{F0AB1F7F-798E-47B3-AAB6-B9334E2C5576}"/>
+                <a16:creationId xmlns:a16="http://schemas.microsoft.com/office/drawing/2014/main" id="{C9364CAD-58B1-45F8-8605-4C3DBCE81E0D}"/>
               </a:ext>
             </a:extLst>
           </p:cNvPr>
@@ -6996,7 +6996,7 @@
           <p:cNvPr id="5" name="">
             <a:extLst xmlns:a="http://schemas.openxmlformats.org/drawingml/2006/main">
               <a:ext uri="{FF2B5EF4-FFF2-40B4-BE49-F238E27FC236}">
-                <a16:creationId xmlns:a16="http://schemas.microsoft.com/office/drawing/2014/main" id="{406D55E4-8619-4E1E-89AE-5004A06C379C}"/>
+                <a16:creationId xmlns:a16="http://schemas.microsoft.com/office/drawing/2014/main" id="{BAB472B9-C699-4C58-9559-2339B4190D70}"/>
               </a:ext>
             </a:extLst>
           </p:cNvPr>
@@ -7053,7 +7053,7 @@
           <p:cNvPr id="6" name="">
             <a:extLst xmlns:a="http://schemas.openxmlformats.org/drawingml/2006/main">
               <a:ext uri="{FF2B5EF4-FFF2-40B4-BE49-F238E27FC236}">
-                <a16:creationId xmlns:a16="http://schemas.microsoft.com/office/drawing/2014/main" id="{15FB1733-B8D3-4BEC-AEF3-DF98D5E7304C}"/>
+                <a16:creationId xmlns:a16="http://schemas.microsoft.com/office/drawing/2014/main" id="{881D4249-BD8A-434A-A54F-24BA231C0D93}"/>
               </a:ext>
             </a:extLst>
           </p:cNvPr>
@@ -7110,7 +7110,7 @@
           <p:cNvPr id="7" name="">
             <a:extLst xmlns:a="http://schemas.openxmlformats.org/drawingml/2006/main">
               <a:ext uri="{FF2B5EF4-FFF2-40B4-BE49-F238E27FC236}">
-                <a16:creationId xmlns:a16="http://schemas.microsoft.com/office/drawing/2014/main" id="{A357335D-34A0-4816-B513-6442237C4BD9}"/>
+                <a16:creationId xmlns:a16="http://schemas.microsoft.com/office/drawing/2014/main" id="{171E6809-B7BF-4BFF-A2B3-878258C14875}"/>
               </a:ext>
             </a:extLst>
           </p:cNvPr>
@@ -7142,7 +7142,7 @@
           <p:cNvPr id="8" name="">
             <a:extLst xmlns:a="http://schemas.openxmlformats.org/drawingml/2006/main">
               <a:ext uri="{FF2B5EF4-FFF2-40B4-BE49-F238E27FC236}">
-                <a16:creationId xmlns:a16="http://schemas.microsoft.com/office/drawing/2014/main" id="{BD770E9F-B71A-4284-B234-8B7B107E8948}"/>
+                <a16:creationId xmlns:a16="http://schemas.microsoft.com/office/drawing/2014/main" id="{6031C1D2-60C5-48C1-864B-91FB52059DB0}"/>
               </a:ext>
             </a:extLst>
           </p:cNvPr>
@@ -7199,7 +7199,7 @@
           <p:cNvPr id="9" name="">
             <a:extLst xmlns:a="http://schemas.openxmlformats.org/drawingml/2006/main">
               <a:ext uri="{FF2B5EF4-FFF2-40B4-BE49-F238E27FC236}">
-                <a16:creationId xmlns:a16="http://schemas.microsoft.com/office/drawing/2014/main" id="{611C0EBB-C6DD-48F3-8441-B7129FA5F165}"/>
+                <a16:creationId xmlns:a16="http://schemas.microsoft.com/office/drawing/2014/main" id="{38B5C1BC-8F13-4AEA-9542-B31ECEB1A9A6}"/>
               </a:ext>
             </a:extLst>
           </p:cNvPr>
@@ -7256,7 +7256,7 @@
           <p:cNvPr id="10" name="">
             <a:extLst xmlns:a="http://schemas.openxmlformats.org/drawingml/2006/main">
               <a:ext uri="{FF2B5EF4-FFF2-40B4-BE49-F238E27FC236}">
-                <a16:creationId xmlns:a16="http://schemas.microsoft.com/office/drawing/2014/main" id="{8E3E6851-8DA0-4986-992E-2D4438526011}"/>
+                <a16:creationId xmlns:a16="http://schemas.microsoft.com/office/drawing/2014/main" id="{037A8F7D-0C9F-41B4-A300-F319003B3AF1}"/>
               </a:ext>
             </a:extLst>
           </p:cNvPr>
@@ -7313,7 +7313,7 @@
           <p:cNvPr id="11" name="">
             <a:extLst xmlns:a="http://schemas.openxmlformats.org/drawingml/2006/main">
               <a:ext uri="{FF2B5EF4-FFF2-40B4-BE49-F238E27FC236}">
-                <a16:creationId xmlns:a16="http://schemas.microsoft.com/office/drawing/2014/main" id="{81546468-99CF-472D-973B-3ED4B16E27B0}"/>
+                <a16:creationId xmlns:a16="http://schemas.microsoft.com/office/drawing/2014/main" id="{A4488024-7482-4DAA-BFBB-0969D7AC49AF}"/>
               </a:ext>
             </a:extLst>
           </p:cNvPr>
@@ -7345,7 +7345,7 @@
           <p:cNvPr id="12" name="">
             <a:extLst xmlns:a="http://schemas.openxmlformats.org/drawingml/2006/main">
               <a:ext uri="{FF2B5EF4-FFF2-40B4-BE49-F238E27FC236}">
-                <a16:creationId xmlns:a16="http://schemas.microsoft.com/office/drawing/2014/main" id="{5F67E609-420B-4A8E-8D4C-6E6EA150C25F}"/>
+                <a16:creationId xmlns:a16="http://schemas.microsoft.com/office/drawing/2014/main" id="{6285D160-69B7-4755-8773-F914A8ACE472}"/>
               </a:ext>
             </a:extLst>
           </p:cNvPr>
@@ -7402,7 +7402,7 @@
           <p:cNvPr id="13" name="">
             <a:extLst xmlns:a="http://schemas.openxmlformats.org/drawingml/2006/main">
               <a:ext uri="{FF2B5EF4-FFF2-40B4-BE49-F238E27FC236}">
-                <a16:creationId xmlns:a16="http://schemas.microsoft.com/office/drawing/2014/main" id="{6A3C7448-BD77-4B15-A71D-5336CA0A3BED}"/>
+                <a16:creationId xmlns:a16="http://schemas.microsoft.com/office/drawing/2014/main" id="{0A64461A-E680-4A2C-9AB7-B94338EC1E83}"/>
               </a:ext>
             </a:extLst>
           </p:cNvPr>
@@ -7459,7 +7459,7 @@
           <p:cNvPr id="14" name="">
             <a:extLst xmlns:a="http://schemas.openxmlformats.org/drawingml/2006/main">
               <a:ext uri="{FF2B5EF4-FFF2-40B4-BE49-F238E27FC236}">
-                <a16:creationId xmlns:a16="http://schemas.microsoft.com/office/drawing/2014/main" id="{18B1A4A9-3517-4051-BB8D-C84A3D9B5A37}"/>
+                <a16:creationId xmlns:a16="http://schemas.microsoft.com/office/drawing/2014/main" id="{36490A8F-23CE-4BC1-97F7-129392FAA810}"/>
               </a:ext>
             </a:extLst>
           </p:cNvPr>
@@ -7516,7 +7516,7 @@
           <p:cNvPr id="15" name="">
             <a:extLst xmlns:a="http://schemas.openxmlformats.org/drawingml/2006/main">
               <a:ext uri="{FF2B5EF4-FFF2-40B4-BE49-F238E27FC236}">
-                <a16:creationId xmlns:a16="http://schemas.microsoft.com/office/drawing/2014/main" id="{9C85122A-BEBB-4207-9DB5-807F7DD1BBDE}"/>
+                <a16:creationId xmlns:a16="http://schemas.microsoft.com/office/drawing/2014/main" id="{BAE36119-D593-4D90-98CE-216A89A1EF09}"/>
               </a:ext>
             </a:extLst>
           </p:cNvPr>
@@ -7571,7 +7571,7 @@
     </p:spTree>
     <p:extLst>
       <p:ext uri="{BB962C8B-B14F-4D97-AF65-F5344CB8AC3E}">
-        <p14:creationId xmlns:p14="http://schemas.microsoft.com/office/powerpoint/2010/main" val="107862914"/>
+        <p14:creationId xmlns:p14="http://schemas.microsoft.com/office/powerpoint/2010/main" val="779994109"/>
       </p:ext>
     </p:extLst>
   </p:cSld>
@@ -7769,10 +7769,10 @@
       </p:grpSpPr>
       <p:sp>
         <p:nvSpPr>
-          <p:cNvPr id="23" name="">
-            <a:extLst xmlns:a="http://schemas.openxmlformats.org/drawingml/2006/main">
-              <a:ext uri="{FF2B5EF4-FFF2-40B4-BE49-F238E27FC236}">
-                <a16:creationId xmlns:a16="http://schemas.microsoft.com/office/drawing/2014/main" id="{D50F9B58-FFBD-49F2-99A5-18EBBF9D6257}"/>
+          <p:cNvPr id="26" name="">
+            <a:extLst xmlns:a="http://schemas.openxmlformats.org/drawingml/2006/main">
+              <a:ext uri="{FF2B5EF4-FFF2-40B4-BE49-F238E27FC236}">
+                <a16:creationId xmlns:a16="http://schemas.microsoft.com/office/drawing/2014/main" id="{A13CC130-C992-49C8-B765-B38BBD26D70B}"/>
               </a:ext>
             </a:extLst>
           </p:cNvPr>
@@ -7804,7 +7804,7 @@
           <p:cNvPr id="2" name="">
             <a:extLst xmlns:a="http://schemas.openxmlformats.org/drawingml/2006/main">
               <a:ext uri="{FF2B5EF4-FFF2-40B4-BE49-F238E27FC236}">
-                <a16:creationId xmlns:a16="http://schemas.microsoft.com/office/drawing/2014/main" id="{0D5D4261-82E5-49A8-BE67-5898FA815C02}"/>
+                <a16:creationId xmlns:a16="http://schemas.microsoft.com/office/drawing/2014/main" id="{142280AE-0D5F-4E10-B23B-1BA339F73870}"/>
               </a:ext>
             </a:extLst>
           </p:cNvPr>
@@ -7861,7 +7861,7 @@
           <p:cNvPr id="3" name="">
             <a:extLst xmlns:a="http://schemas.openxmlformats.org/drawingml/2006/main">
               <a:ext uri="{FF2B5EF4-FFF2-40B4-BE49-F238E27FC236}">
-                <a16:creationId xmlns:a16="http://schemas.microsoft.com/office/drawing/2014/main" id="{94C734FA-E3DD-4672-A514-C68D3DB6B25C}"/>
+                <a16:creationId xmlns:a16="http://schemas.microsoft.com/office/drawing/2014/main" id="{7D088234-2CC8-4E7A-8428-695DB434DFEB}"/>
               </a:ext>
             </a:extLst>
           </p:cNvPr>
@@ -7893,7 +7893,7 @@
           <p:cNvPr id="4" name="">
             <a:extLst xmlns:a="http://schemas.openxmlformats.org/drawingml/2006/main">
               <a:ext uri="{FF2B5EF4-FFF2-40B4-BE49-F238E27FC236}">
-                <a16:creationId xmlns:a16="http://schemas.microsoft.com/office/drawing/2014/main" id="{F3A0187B-0A54-4FBA-B78A-FF0B79AA6612}"/>
+                <a16:creationId xmlns:a16="http://schemas.microsoft.com/office/drawing/2014/main" id="{511225C7-2563-41E1-BCB3-8A0DC8B4ED5E}"/>
               </a:ext>
             </a:extLst>
           </p:cNvPr>
@@ -7950,7 +7950,7 @@
           <p:cNvPr id="5" name="">
             <a:extLst xmlns:a="http://schemas.openxmlformats.org/drawingml/2006/main">
               <a:ext uri="{FF2B5EF4-FFF2-40B4-BE49-F238E27FC236}">
-                <a16:creationId xmlns:a16="http://schemas.microsoft.com/office/drawing/2014/main" id="{B87E9964-AFA7-48D0-A3FA-E7B030A857E1}"/>
+                <a16:creationId xmlns:a16="http://schemas.microsoft.com/office/drawing/2014/main" id="{E41F7FDC-0436-476E-A3D7-D50F539BD37F}"/>
               </a:ext>
             </a:extLst>
           </p:cNvPr>
@@ -8007,7 +8007,7 @@
           <p:cNvPr id="6" name="">
             <a:extLst xmlns:a="http://schemas.openxmlformats.org/drawingml/2006/main">
               <a:ext uri="{FF2B5EF4-FFF2-40B4-BE49-F238E27FC236}">
-                <a16:creationId xmlns:a16="http://schemas.microsoft.com/office/drawing/2014/main" id="{84B62E11-D7D5-4101-A439-118346D8198F}"/>
+                <a16:creationId xmlns:a16="http://schemas.microsoft.com/office/drawing/2014/main" id="{8D822C63-F2C7-4165-A109-54454DA77878}"/>
               </a:ext>
             </a:extLst>
           </p:cNvPr>
@@ -8064,7 +8064,7 @@
           <p:cNvPr id="7" name="">
             <a:extLst xmlns:a="http://schemas.openxmlformats.org/drawingml/2006/main">
               <a:ext uri="{FF2B5EF4-FFF2-40B4-BE49-F238E27FC236}">
-                <a16:creationId xmlns:a16="http://schemas.microsoft.com/office/drawing/2014/main" id="{48130540-B773-4D73-B903-26583A8BE331}"/>
+                <a16:creationId xmlns:a16="http://schemas.microsoft.com/office/drawing/2014/main" id="{51D56C8E-353D-4AA6-BB99-072A3AE1BDF8}"/>
               </a:ext>
             </a:extLst>
           </p:cNvPr>
@@ -8096,7 +8096,7 @@
           <p:cNvPr id="8" name="">
             <a:extLst xmlns:a="http://schemas.openxmlformats.org/drawingml/2006/main">
               <a:ext uri="{FF2B5EF4-FFF2-40B4-BE49-F238E27FC236}">
-                <a16:creationId xmlns:a16="http://schemas.microsoft.com/office/drawing/2014/main" id="{75F4D6F2-2B20-4EB5-A28C-320ECF010937}"/>
+                <a16:creationId xmlns:a16="http://schemas.microsoft.com/office/drawing/2014/main" id="{4DE80404-E0CD-44AE-9E65-E7ABE00592A9}"/>
               </a:ext>
             </a:extLst>
           </p:cNvPr>
@@ -8153,7 +8153,7 @@
           <p:cNvPr id="9" name="">
             <a:extLst xmlns:a="http://schemas.openxmlformats.org/drawingml/2006/main">
               <a:ext uri="{FF2B5EF4-FFF2-40B4-BE49-F238E27FC236}">
-                <a16:creationId xmlns:a16="http://schemas.microsoft.com/office/drawing/2014/main" id="{3EB5D6CE-D245-4A98-B0E3-F966DE93A80E}"/>
+                <a16:creationId xmlns:a16="http://schemas.microsoft.com/office/drawing/2014/main" id="{E3E49F44-1778-413F-A532-CD7868658199}"/>
               </a:ext>
             </a:extLst>
           </p:cNvPr>
@@ -8210,19 +8210,19 @@
           <p:cNvPr id="10" name="">
             <a:extLst xmlns:a="http://schemas.openxmlformats.org/drawingml/2006/main">
               <a:ext uri="{FF2B5EF4-FFF2-40B4-BE49-F238E27FC236}">
-                <a16:creationId xmlns:a16="http://schemas.microsoft.com/office/drawing/2014/main" id="{80A23240-3C23-4F2F-A0DE-1CB9AE6835AF}"/>
-              </a:ext>
-            </a:extLst>
-          </p:cNvPr>
-          <p:cNvSpPr>
-            <a:spLocks xmlns:a="http://schemas.openxmlformats.org/drawingml/2006/main" noGrp="1"/>
-          </p:cNvSpPr>
-          <p:nvPr/>
-        </p:nvSpPr>
-        <p:spPr>
-          <a:xfrm xmlns:a="http://schemas.openxmlformats.org/drawingml/2006/main">
-            <a:off x="914400" y="1257300"/>
-            <a:ext cx="10363200" cy="781050"/>
+                <a16:creationId xmlns:a16="http://schemas.microsoft.com/office/drawing/2014/main" id="{9523695D-1578-48AE-9E43-EB5F5A5DF59B}"/>
+              </a:ext>
+            </a:extLst>
+          </p:cNvPr>
+          <p:cNvSpPr>
+            <a:spLocks xmlns:a="http://schemas.openxmlformats.org/drawingml/2006/main" noGrp="1"/>
+          </p:cNvSpPr>
+          <p:nvPr/>
+        </p:nvSpPr>
+        <p:spPr>
+          <a:xfrm xmlns:a="http://schemas.openxmlformats.org/drawingml/2006/main">
+            <a:off x="857250" y="1219200"/>
+            <a:ext cx="10477500" cy="742950"/>
           </a:xfrm>
           <a:prstGeom xmlns:a="http://schemas.openxmlformats.org/drawingml/2006/main" prst="rect">
             <a:avLst/>
@@ -8239,7 +8239,7 @@
           <a:lstStyle xmlns:a="http://schemas.openxmlformats.org/drawingml/2006/main"/>
           <a:p xmlns:a="http://schemas.openxmlformats.org/drawingml/2006/main">
             <a:pPr algn="ctr">
-              <a:defRPr sz="2175" b="1">
+              <a:defRPr sz="2100" b="1">
                 <a:solidFill>
                   <a:srgbClr val="17253A"/>
                 </a:solidFill>
@@ -8249,7 +8249,7 @@
               </a:defRPr>
             </a:pPr>
             <a:r>
-              <a:rPr sz="2175" b="1">
+              <a:rPr sz="2100" b="1">
                 <a:solidFill>
                   <a:srgbClr val="17253A"/>
                 </a:solidFill>
@@ -8267,28 +8267,30 @@
           <p:cNvPr id="11" name="">
             <a:extLst xmlns:a="http://schemas.openxmlformats.org/drawingml/2006/main">
               <a:ext uri="{FF2B5EF4-FFF2-40B4-BE49-F238E27FC236}">
-                <a16:creationId xmlns:a16="http://schemas.microsoft.com/office/drawing/2014/main" id="{C0036B4C-C275-4224-BC34-7F2BA04CB433}"/>
-              </a:ext>
-            </a:extLst>
-          </p:cNvPr>
-          <p:cNvSpPr>
-            <a:spLocks xmlns:a="http://schemas.openxmlformats.org/drawingml/2006/main" noGrp="1"/>
-          </p:cNvSpPr>
-          <p:nvPr/>
-        </p:nvSpPr>
-        <p:spPr>
-          <a:xfrm xmlns:a="http://schemas.openxmlformats.org/drawingml/2006/main">
-            <a:off x="1000125" y="2247900"/>
-            <a:ext cx="476250" cy="476250"/>
-          </a:xfrm>
-          <a:prstGeom xmlns:a="http://schemas.openxmlformats.org/drawingml/2006/main" prst="ellipse">
+                <a16:creationId xmlns:a16="http://schemas.microsoft.com/office/drawing/2014/main" id="{B10E1D35-7399-46D7-BF13-AC5273547541}"/>
+              </a:ext>
+            </a:extLst>
+          </p:cNvPr>
+          <p:cNvSpPr>
+            <a:spLocks xmlns:a="http://schemas.openxmlformats.org/drawingml/2006/main" noGrp="1"/>
+          </p:cNvSpPr>
+          <p:nvPr/>
+        </p:nvSpPr>
+        <p:spPr>
+          <a:xfrm xmlns:a="http://schemas.openxmlformats.org/drawingml/2006/main">
+            <a:off x="971550" y="2124075"/>
+            <a:ext cx="38100" cy="3524250"/>
+          </a:xfrm>
+          <a:prstGeom xmlns:a="http://schemas.openxmlformats.org/drawingml/2006/main" prst="rect">
             <a:avLst/>
           </a:prstGeom>
           <a:solidFill xmlns:a="http://schemas.openxmlformats.org/drawingml/2006/main">
-            <a:srgbClr val="18324A"/>
+            <a:srgbClr val="2C6E73"/>
           </a:solidFill>
           <a:ln xmlns:a="http://schemas.openxmlformats.org/drawingml/2006/main" w="0">
-            <a:noFill/>
+            <a:solidFill>
+              <a:srgbClr val="2C6E73"/>
+            </a:solidFill>
           </a:ln>
         </p:spPr>
       </p:sp>
@@ -8297,19 +8299,19 @@
           <p:cNvPr id="12" name="">
             <a:extLst xmlns:a="http://schemas.openxmlformats.org/drawingml/2006/main">
               <a:ext uri="{FF2B5EF4-FFF2-40B4-BE49-F238E27FC236}">
-                <a16:creationId xmlns:a16="http://schemas.microsoft.com/office/drawing/2014/main" id="{AA6C835F-AA0E-4157-AEB3-A2759331CFBB}"/>
-              </a:ext>
-            </a:extLst>
-          </p:cNvPr>
-          <p:cNvSpPr>
-            <a:spLocks xmlns:a="http://schemas.openxmlformats.org/drawingml/2006/main" noGrp="1"/>
-          </p:cNvSpPr>
-          <p:nvPr/>
-        </p:nvSpPr>
-        <p:spPr>
-          <a:xfrm xmlns:a="http://schemas.openxmlformats.org/drawingml/2006/main">
-            <a:off x="1000125" y="2276475"/>
-            <a:ext cx="476250" cy="419100"/>
+                <a16:creationId xmlns:a16="http://schemas.microsoft.com/office/drawing/2014/main" id="{5B812DE0-6074-47A5-98BD-A441D9F39CE1}"/>
+              </a:ext>
+            </a:extLst>
+          </p:cNvPr>
+          <p:cNvSpPr>
+            <a:spLocks xmlns:a="http://schemas.openxmlformats.org/drawingml/2006/main" noGrp="1"/>
+          </p:cNvSpPr>
+          <p:nvPr/>
+        </p:nvSpPr>
+        <p:spPr>
+          <a:xfrm xmlns:a="http://schemas.openxmlformats.org/drawingml/2006/main">
+            <a:off x="1162050" y="2200275"/>
+            <a:ext cx="400050" cy="400050"/>
           </a:xfrm>
           <a:prstGeom xmlns:a="http://schemas.openxmlformats.org/drawingml/2006/main" prst="rect">
             <a:avLst/>
@@ -8326,9 +8328,9 @@
           <a:lstStyle xmlns:a="http://schemas.openxmlformats.org/drawingml/2006/main"/>
           <a:p xmlns:a="http://schemas.openxmlformats.org/drawingml/2006/main">
             <a:pPr algn="ctr">
-              <a:defRPr sz="1350" b="1">
-                <a:solidFill>
-                  <a:srgbClr val="FFFFFF"/>
+              <a:defRPr sz="1125" b="1">
+                <a:solidFill>
+                  <a:srgbClr val="2C6E73"/>
                 </a:solidFill>
                 <a:latin typeface="Arial"/>
                 <a:ea typeface="Arial"/>
@@ -8336,9 +8338,9 @@
               </a:defRPr>
             </a:pPr>
             <a:r>
-              <a:rPr sz="1350" b="1">
-                <a:solidFill>
-                  <a:srgbClr val="FFFFFF"/>
+              <a:rPr sz="1125" b="1">
+                <a:solidFill>
+                  <a:srgbClr val="2C6E73"/>
                 </a:solidFill>
                 <a:latin typeface="Arial"/>
                 <a:ea typeface="Arial"/>
@@ -8354,19 +8356,19 @@
           <p:cNvPr id="13" name="">
             <a:extLst xmlns:a="http://schemas.openxmlformats.org/drawingml/2006/main">
               <a:ext uri="{FF2B5EF4-FFF2-40B4-BE49-F238E27FC236}">
-                <a16:creationId xmlns:a16="http://schemas.microsoft.com/office/drawing/2014/main" id="{7CA22346-B438-40D4-A35B-41A82C7BF238}"/>
-              </a:ext>
-            </a:extLst>
-          </p:cNvPr>
-          <p:cNvSpPr>
-            <a:spLocks xmlns:a="http://schemas.openxmlformats.org/drawingml/2006/main" noGrp="1"/>
-          </p:cNvSpPr>
-          <p:nvPr/>
-        </p:nvSpPr>
-        <p:spPr>
-          <a:xfrm xmlns:a="http://schemas.openxmlformats.org/drawingml/2006/main">
-            <a:off x="1714500" y="2181225"/>
-            <a:ext cx="9429750" cy="609600"/>
+                <a16:creationId xmlns:a16="http://schemas.microsoft.com/office/drawing/2014/main" id="{C6864157-33B6-4279-B7E0-9C311C5F7340}"/>
+              </a:ext>
+            </a:extLst>
+          </p:cNvPr>
+          <p:cNvSpPr>
+            <a:spLocks xmlns:a="http://schemas.openxmlformats.org/drawingml/2006/main" noGrp="1"/>
+          </p:cNvSpPr>
+          <p:nvPr/>
+        </p:nvSpPr>
+        <p:spPr>
+          <a:xfrm xmlns:a="http://schemas.openxmlformats.org/drawingml/2006/main">
+            <a:off x="1714500" y="2114550"/>
+            <a:ext cx="9525000" cy="638175"/>
           </a:xfrm>
           <a:prstGeom xmlns:a="http://schemas.openxmlformats.org/drawingml/2006/main" prst="rect">
             <a:avLst/>
@@ -8383,7 +8385,7 @@
           <a:lstStyle xmlns:a="http://schemas.openxmlformats.org/drawingml/2006/main"/>
           <a:p xmlns:a="http://schemas.openxmlformats.org/drawingml/2006/main">
             <a:pPr algn="l">
-              <a:defRPr sz="1500" b="0">
+              <a:defRPr sz="1575" b="0">
                 <a:solidFill>
                   <a:srgbClr val="17253A"/>
                 </a:solidFill>
@@ -8393,7 +8395,7 @@
               </a:defRPr>
             </a:pPr>
             <a:r>
-              <a:rPr sz="1500" b="0">
+              <a:rPr sz="1575" b="0">
                 <a:solidFill>
                   <a:srgbClr val="17253A"/>
                 </a:solidFill>
@@ -8401,7 +8403,7 @@
                 <a:ea typeface="Arial"/>
                 <a:cs typeface="Arial"/>
               </a:rPr>
-              <a:t>Identify the structure: Identify the domain and retrieve the relevant representation or method.</a:t>
+              <a:t>37.5% of 640</a:t>
             </a:r>
           </a:p>
         </p:txBody>
@@ -8411,28 +8413,30 @@
           <p:cNvPr id="14" name="">
             <a:extLst xmlns:a="http://schemas.openxmlformats.org/drawingml/2006/main">
               <a:ext uri="{FF2B5EF4-FFF2-40B4-BE49-F238E27FC236}">
-                <a16:creationId xmlns:a16="http://schemas.microsoft.com/office/drawing/2014/main" id="{B3A1D173-2B42-45B2-8E22-E54B5006106D}"/>
-              </a:ext>
-            </a:extLst>
-          </p:cNvPr>
-          <p:cNvSpPr>
-            <a:spLocks xmlns:a="http://schemas.openxmlformats.org/drawingml/2006/main" noGrp="1"/>
-          </p:cNvSpPr>
-          <p:nvPr/>
-        </p:nvSpPr>
-        <p:spPr>
-          <a:xfrm xmlns:a="http://schemas.openxmlformats.org/drawingml/2006/main">
-            <a:off x="1000125" y="2990850"/>
-            <a:ext cx="476250" cy="476250"/>
-          </a:xfrm>
-          <a:prstGeom xmlns:a="http://schemas.openxmlformats.org/drawingml/2006/main" prst="ellipse">
+                <a16:creationId xmlns:a16="http://schemas.microsoft.com/office/drawing/2014/main" id="{DB9CCB63-1098-4E60-9971-492A0FF235E2}"/>
+              </a:ext>
+            </a:extLst>
+          </p:cNvPr>
+          <p:cNvSpPr>
+            <a:spLocks xmlns:a="http://schemas.openxmlformats.org/drawingml/2006/main" noGrp="1"/>
+          </p:cNvSpPr>
+          <p:nvPr/>
+        </p:nvSpPr>
+        <p:spPr>
+          <a:xfrm xmlns:a="http://schemas.openxmlformats.org/drawingml/2006/main">
+            <a:off x="1714500" y="2771775"/>
+            <a:ext cx="9334500" cy="9525"/>
+          </a:xfrm>
+          <a:prstGeom xmlns:a="http://schemas.openxmlformats.org/drawingml/2006/main" prst="rect">
             <a:avLst/>
           </a:prstGeom>
           <a:solidFill xmlns:a="http://schemas.openxmlformats.org/drawingml/2006/main">
-            <a:srgbClr val="2C6E73"/>
+            <a:srgbClr val="D9E0E6"/>
           </a:solidFill>
           <a:ln xmlns:a="http://schemas.openxmlformats.org/drawingml/2006/main" w="0">
-            <a:noFill/>
+            <a:solidFill>
+              <a:srgbClr val="D9E0E6"/>
+            </a:solidFill>
           </a:ln>
         </p:spPr>
       </p:sp>
@@ -8441,19 +8445,19 @@
           <p:cNvPr id="15" name="">
             <a:extLst xmlns:a="http://schemas.openxmlformats.org/drawingml/2006/main">
               <a:ext uri="{FF2B5EF4-FFF2-40B4-BE49-F238E27FC236}">
-                <a16:creationId xmlns:a16="http://schemas.microsoft.com/office/drawing/2014/main" id="{1F4E8692-C361-4D87-B3D5-62926BC6E29A}"/>
-              </a:ext>
-            </a:extLst>
-          </p:cNvPr>
-          <p:cNvSpPr>
-            <a:spLocks xmlns:a="http://schemas.openxmlformats.org/drawingml/2006/main" noGrp="1"/>
-          </p:cNvSpPr>
-          <p:nvPr/>
-        </p:nvSpPr>
-        <p:spPr>
-          <a:xfrm xmlns:a="http://schemas.openxmlformats.org/drawingml/2006/main">
-            <a:off x="1000125" y="3019425"/>
-            <a:ext cx="476250" cy="419100"/>
+                <a16:creationId xmlns:a16="http://schemas.microsoft.com/office/drawing/2014/main" id="{633A8648-1D41-41D4-854A-356DF0B69A62}"/>
+              </a:ext>
+            </a:extLst>
+          </p:cNvPr>
+          <p:cNvSpPr>
+            <a:spLocks xmlns:a="http://schemas.openxmlformats.org/drawingml/2006/main" noGrp="1"/>
+          </p:cNvSpPr>
+          <p:nvPr/>
+        </p:nvSpPr>
+        <p:spPr>
+          <a:xfrm xmlns:a="http://schemas.openxmlformats.org/drawingml/2006/main">
+            <a:off x="1162050" y="2905125"/>
+            <a:ext cx="400050" cy="400050"/>
           </a:xfrm>
           <a:prstGeom xmlns:a="http://schemas.openxmlformats.org/drawingml/2006/main" prst="rect">
             <a:avLst/>
@@ -8470,9 +8474,9 @@
           <a:lstStyle xmlns:a="http://schemas.openxmlformats.org/drawingml/2006/main"/>
           <a:p xmlns:a="http://schemas.openxmlformats.org/drawingml/2006/main">
             <a:pPr algn="ctr">
-              <a:defRPr sz="1350" b="1">
-                <a:solidFill>
-                  <a:srgbClr val="FFFFFF"/>
+              <a:defRPr sz="1125" b="1">
+                <a:solidFill>
+                  <a:srgbClr val="2C6E73"/>
                 </a:solidFill>
                 <a:latin typeface="Arial"/>
                 <a:ea typeface="Arial"/>
@@ -8480,9 +8484,9 @@
               </a:defRPr>
             </a:pPr>
             <a:r>
-              <a:rPr sz="1350" b="1">
-                <a:solidFill>
-                  <a:srgbClr val="FFFFFF"/>
+              <a:rPr sz="1125" b="1">
+                <a:solidFill>
+                  <a:srgbClr val="2C6E73"/>
                 </a:solidFill>
                 <a:latin typeface="Arial"/>
                 <a:ea typeface="Arial"/>
@@ -8498,19 +8502,19 @@
           <p:cNvPr id="16" name="">
             <a:extLst xmlns:a="http://schemas.openxmlformats.org/drawingml/2006/main">
               <a:ext uri="{FF2B5EF4-FFF2-40B4-BE49-F238E27FC236}">
-                <a16:creationId xmlns:a16="http://schemas.microsoft.com/office/drawing/2014/main" id="{995B48F8-D861-47C9-8BEE-5876E94BFB8C}"/>
-              </a:ext>
-            </a:extLst>
-          </p:cNvPr>
-          <p:cNvSpPr>
-            <a:spLocks xmlns:a="http://schemas.openxmlformats.org/drawingml/2006/main" noGrp="1"/>
-          </p:cNvSpPr>
-          <p:nvPr/>
-        </p:nvSpPr>
-        <p:spPr>
-          <a:xfrm xmlns:a="http://schemas.openxmlformats.org/drawingml/2006/main">
-            <a:off x="1714500" y="2924175"/>
-            <a:ext cx="9429750" cy="609600"/>
+                <a16:creationId xmlns:a16="http://schemas.microsoft.com/office/drawing/2014/main" id="{1AC0381B-D3A1-4516-B1C1-FA1F4D3D6630}"/>
+              </a:ext>
+            </a:extLst>
+          </p:cNvPr>
+          <p:cNvSpPr>
+            <a:spLocks xmlns:a="http://schemas.openxmlformats.org/drawingml/2006/main" noGrp="1"/>
+          </p:cNvSpPr>
+          <p:nvPr/>
+        </p:nvSpPr>
+        <p:spPr>
+          <a:xfrm xmlns:a="http://schemas.openxmlformats.org/drawingml/2006/main">
+            <a:off x="1714500" y="2819400"/>
+            <a:ext cx="9525000" cy="638175"/>
           </a:xfrm>
           <a:prstGeom xmlns:a="http://schemas.openxmlformats.org/drawingml/2006/main" prst="rect">
             <a:avLst/>
@@ -8527,7 +8531,7 @@
           <a:lstStyle xmlns:a="http://schemas.openxmlformats.org/drawingml/2006/main"/>
           <a:p xmlns:a="http://schemas.openxmlformats.org/drawingml/2006/main">
             <a:pPr algn="l">
-              <a:defRPr sz="1500" b="0">
+              <a:defRPr sz="1575" b="0">
                 <a:solidFill>
                   <a:srgbClr val="17253A"/>
                 </a:solidFill>
@@ -8537,7 +8541,7 @@
               </a:defRPr>
             </a:pPr>
             <a:r>
-              <a:rPr sz="1500" b="0">
+              <a:rPr sz="1575" b="0">
                 <a:solidFill>
                   <a:srgbClr val="17253A"/>
                 </a:solidFill>
@@ -8545,7 +8549,7 @@
                 <a:ea typeface="Arial"/>
                 <a:cs typeface="Arial"/>
               </a:rPr>
-              <a:t>Set up the method: Show a complete calculation with precise vocabulary.</a:t>
+              <a:t>25% = 160</a:t>
             </a:r>
           </a:p>
         </p:txBody>
@@ -8555,28 +8559,30 @@
           <p:cNvPr id="17" name="">
             <a:extLst xmlns:a="http://schemas.openxmlformats.org/drawingml/2006/main">
               <a:ext uri="{FF2B5EF4-FFF2-40B4-BE49-F238E27FC236}">
-                <a16:creationId xmlns:a16="http://schemas.microsoft.com/office/drawing/2014/main" id="{97424A65-42C0-4E8C-935C-12CB37CC2466}"/>
-              </a:ext>
-            </a:extLst>
-          </p:cNvPr>
-          <p:cNvSpPr>
-            <a:spLocks xmlns:a="http://schemas.openxmlformats.org/drawingml/2006/main" noGrp="1"/>
-          </p:cNvSpPr>
-          <p:nvPr/>
-        </p:nvSpPr>
-        <p:spPr>
-          <a:xfrm xmlns:a="http://schemas.openxmlformats.org/drawingml/2006/main">
-            <a:off x="1000125" y="3733800"/>
-            <a:ext cx="476250" cy="476250"/>
-          </a:xfrm>
-          <a:prstGeom xmlns:a="http://schemas.openxmlformats.org/drawingml/2006/main" prst="ellipse">
+                <a16:creationId xmlns:a16="http://schemas.microsoft.com/office/drawing/2014/main" id="{C0D8DDAD-ED88-498C-A4B8-C2762C216FFA}"/>
+              </a:ext>
+            </a:extLst>
+          </p:cNvPr>
+          <p:cNvSpPr>
+            <a:spLocks xmlns:a="http://schemas.openxmlformats.org/drawingml/2006/main" noGrp="1"/>
+          </p:cNvSpPr>
+          <p:nvPr/>
+        </p:nvSpPr>
+        <p:spPr>
+          <a:xfrm xmlns:a="http://schemas.openxmlformats.org/drawingml/2006/main">
+            <a:off x="1714500" y="3476625"/>
+            <a:ext cx="9334500" cy="9525"/>
+          </a:xfrm>
+          <a:prstGeom xmlns:a="http://schemas.openxmlformats.org/drawingml/2006/main" prst="rect">
             <a:avLst/>
           </a:prstGeom>
           <a:solidFill xmlns:a="http://schemas.openxmlformats.org/drawingml/2006/main">
-            <a:srgbClr val="2C6E73"/>
+            <a:srgbClr val="D9E0E6"/>
           </a:solidFill>
           <a:ln xmlns:a="http://schemas.openxmlformats.org/drawingml/2006/main" w="0">
-            <a:noFill/>
+            <a:solidFill>
+              <a:srgbClr val="D9E0E6"/>
+            </a:solidFill>
           </a:ln>
         </p:spPr>
       </p:sp>
@@ -8585,19 +8591,19 @@
           <p:cNvPr id="18" name="">
             <a:extLst xmlns:a="http://schemas.openxmlformats.org/drawingml/2006/main">
               <a:ext uri="{FF2B5EF4-FFF2-40B4-BE49-F238E27FC236}">
-                <a16:creationId xmlns:a16="http://schemas.microsoft.com/office/drawing/2014/main" id="{F409730D-9AF8-4702-B955-0984F9DF8A86}"/>
-              </a:ext>
-            </a:extLst>
-          </p:cNvPr>
-          <p:cNvSpPr>
-            <a:spLocks xmlns:a="http://schemas.openxmlformats.org/drawingml/2006/main" noGrp="1"/>
-          </p:cNvSpPr>
-          <p:nvPr/>
-        </p:nvSpPr>
-        <p:spPr>
-          <a:xfrm xmlns:a="http://schemas.openxmlformats.org/drawingml/2006/main">
-            <a:off x="1000125" y="3762375"/>
-            <a:ext cx="476250" cy="419100"/>
+                <a16:creationId xmlns:a16="http://schemas.microsoft.com/office/drawing/2014/main" id="{B85EF828-CBB7-49B2-BFFA-C0DD0EEB5398}"/>
+              </a:ext>
+            </a:extLst>
+          </p:cNvPr>
+          <p:cNvSpPr>
+            <a:spLocks xmlns:a="http://schemas.openxmlformats.org/drawingml/2006/main" noGrp="1"/>
+          </p:cNvSpPr>
+          <p:nvPr/>
+        </p:nvSpPr>
+        <p:spPr>
+          <a:xfrm xmlns:a="http://schemas.openxmlformats.org/drawingml/2006/main">
+            <a:off x="1162050" y="3609975"/>
+            <a:ext cx="400050" cy="400050"/>
           </a:xfrm>
           <a:prstGeom xmlns:a="http://schemas.openxmlformats.org/drawingml/2006/main" prst="rect">
             <a:avLst/>
@@ -8614,9 +8620,9 @@
           <a:lstStyle xmlns:a="http://schemas.openxmlformats.org/drawingml/2006/main"/>
           <a:p xmlns:a="http://schemas.openxmlformats.org/drawingml/2006/main">
             <a:pPr algn="ctr">
-              <a:defRPr sz="1350" b="1">
-                <a:solidFill>
-                  <a:srgbClr val="FFFFFF"/>
+              <a:defRPr sz="1125" b="1">
+                <a:solidFill>
+                  <a:srgbClr val="2C6E73"/>
                 </a:solidFill>
                 <a:latin typeface="Arial"/>
                 <a:ea typeface="Arial"/>
@@ -8624,9 +8630,9 @@
               </a:defRPr>
             </a:pPr>
             <a:r>
-              <a:rPr sz="1350" b="1">
-                <a:solidFill>
-                  <a:srgbClr val="FFFFFF"/>
+              <a:rPr sz="1125" b="1">
+                <a:solidFill>
+                  <a:srgbClr val="2C6E73"/>
                 </a:solidFill>
                 <a:latin typeface="Arial"/>
                 <a:ea typeface="Arial"/>
@@ -8642,19 +8648,19 @@
           <p:cNvPr id="19" name="">
             <a:extLst xmlns:a="http://schemas.openxmlformats.org/drawingml/2006/main">
               <a:ext uri="{FF2B5EF4-FFF2-40B4-BE49-F238E27FC236}">
-                <a16:creationId xmlns:a16="http://schemas.microsoft.com/office/drawing/2014/main" id="{C138FF27-6078-482A-B490-B350116D41EA}"/>
-              </a:ext>
-            </a:extLst>
-          </p:cNvPr>
-          <p:cNvSpPr>
-            <a:spLocks xmlns:a="http://schemas.openxmlformats.org/drawingml/2006/main" noGrp="1"/>
-          </p:cNvSpPr>
-          <p:nvPr/>
-        </p:nvSpPr>
-        <p:spPr>
-          <a:xfrm xmlns:a="http://schemas.openxmlformats.org/drawingml/2006/main">
-            <a:off x="1714500" y="3667125"/>
-            <a:ext cx="9429750" cy="609600"/>
+                <a16:creationId xmlns:a16="http://schemas.microsoft.com/office/drawing/2014/main" id="{93756BA4-B82A-476A-982D-7A099C6707C3}"/>
+              </a:ext>
+            </a:extLst>
+          </p:cNvPr>
+          <p:cNvSpPr>
+            <a:spLocks xmlns:a="http://schemas.openxmlformats.org/drawingml/2006/main" noGrp="1"/>
+          </p:cNvSpPr>
+          <p:nvPr/>
+        </p:nvSpPr>
+        <p:spPr>
+          <a:xfrm xmlns:a="http://schemas.openxmlformats.org/drawingml/2006/main">
+            <a:off x="1714500" y="3524250"/>
+            <a:ext cx="9525000" cy="638175"/>
           </a:xfrm>
           <a:prstGeom xmlns:a="http://schemas.openxmlformats.org/drawingml/2006/main" prst="rect">
             <a:avLst/>
@@ -8671,7 +8677,7 @@
           <a:lstStyle xmlns:a="http://schemas.openxmlformats.org/drawingml/2006/main"/>
           <a:p xmlns:a="http://schemas.openxmlformats.org/drawingml/2006/main">
             <a:pPr algn="l">
-              <a:defRPr sz="1500" b="0">
+              <a:defRPr sz="1575" b="0">
                 <a:solidFill>
                   <a:srgbClr val="17253A"/>
                 </a:solidFill>
@@ -8681,7 +8687,7 @@
               </a:defRPr>
             </a:pPr>
             <a:r>
-              <a:rPr sz="1500" b="0">
+              <a:rPr sz="1575" b="0">
                 <a:solidFill>
                   <a:srgbClr val="17253A"/>
                 </a:solidFill>
@@ -8689,7 +8695,7 @@
                 <a:ea typeface="Arial"/>
                 <a:cs typeface="Arial"/>
               </a:rPr>
-              <a:t>Complete the calculation: 240.</a:t>
+              <a:t>12.5% = 80</a:t>
             </a:r>
           </a:p>
         </p:txBody>
@@ -8699,28 +8705,30 @@
           <p:cNvPr id="20" name="">
             <a:extLst xmlns:a="http://schemas.openxmlformats.org/drawingml/2006/main">
               <a:ext uri="{FF2B5EF4-FFF2-40B4-BE49-F238E27FC236}">
-                <a16:creationId xmlns:a16="http://schemas.microsoft.com/office/drawing/2014/main" id="{823E1517-A70B-440A-BD84-20A9D7989BB9}"/>
-              </a:ext>
-            </a:extLst>
-          </p:cNvPr>
-          <p:cNvSpPr>
-            <a:spLocks xmlns:a="http://schemas.openxmlformats.org/drawingml/2006/main" noGrp="1"/>
-          </p:cNvSpPr>
-          <p:nvPr/>
-        </p:nvSpPr>
-        <p:spPr>
-          <a:xfrm xmlns:a="http://schemas.openxmlformats.org/drawingml/2006/main">
-            <a:off x="1000125" y="4476750"/>
-            <a:ext cx="476250" cy="476250"/>
-          </a:xfrm>
-          <a:prstGeom xmlns:a="http://schemas.openxmlformats.org/drawingml/2006/main" prst="ellipse">
+                <a16:creationId xmlns:a16="http://schemas.microsoft.com/office/drawing/2014/main" id="{CEE06788-C57E-42FF-A24C-4DA58360110E}"/>
+              </a:ext>
+            </a:extLst>
+          </p:cNvPr>
+          <p:cNvSpPr>
+            <a:spLocks xmlns:a="http://schemas.openxmlformats.org/drawingml/2006/main" noGrp="1"/>
+          </p:cNvSpPr>
+          <p:nvPr/>
+        </p:nvSpPr>
+        <p:spPr>
+          <a:xfrm xmlns:a="http://schemas.openxmlformats.org/drawingml/2006/main">
+            <a:off x="1714500" y="4181475"/>
+            <a:ext cx="9334500" cy="9525"/>
+          </a:xfrm>
+          <a:prstGeom xmlns:a="http://schemas.openxmlformats.org/drawingml/2006/main" prst="rect">
             <a:avLst/>
           </a:prstGeom>
           <a:solidFill xmlns:a="http://schemas.openxmlformats.org/drawingml/2006/main">
-            <a:srgbClr val="2C6E73"/>
+            <a:srgbClr val="D9E0E6"/>
           </a:solidFill>
           <a:ln xmlns:a="http://schemas.openxmlformats.org/drawingml/2006/main" w="0">
-            <a:noFill/>
+            <a:solidFill>
+              <a:srgbClr val="D9E0E6"/>
+            </a:solidFill>
           </a:ln>
         </p:spPr>
       </p:sp>
@@ -8729,19 +8737,19 @@
           <p:cNvPr id="21" name="">
             <a:extLst xmlns:a="http://schemas.openxmlformats.org/drawingml/2006/main">
               <a:ext uri="{FF2B5EF4-FFF2-40B4-BE49-F238E27FC236}">
-                <a16:creationId xmlns:a16="http://schemas.microsoft.com/office/drawing/2014/main" id="{F31F6219-0428-4E2B-9641-C32CE2FD74E5}"/>
-              </a:ext>
-            </a:extLst>
-          </p:cNvPr>
-          <p:cNvSpPr>
-            <a:spLocks xmlns:a="http://schemas.openxmlformats.org/drawingml/2006/main" noGrp="1"/>
-          </p:cNvSpPr>
-          <p:nvPr/>
-        </p:nvSpPr>
-        <p:spPr>
-          <a:xfrm xmlns:a="http://schemas.openxmlformats.org/drawingml/2006/main">
-            <a:off x="1000125" y="4505325"/>
-            <a:ext cx="476250" cy="419100"/>
+                <a16:creationId xmlns:a16="http://schemas.microsoft.com/office/drawing/2014/main" id="{AFB218F2-47F0-4DED-99AD-D675A6FB769F}"/>
+              </a:ext>
+            </a:extLst>
+          </p:cNvPr>
+          <p:cNvSpPr>
+            <a:spLocks xmlns:a="http://schemas.openxmlformats.org/drawingml/2006/main" noGrp="1"/>
+          </p:cNvSpPr>
+          <p:nvPr/>
+        </p:nvSpPr>
+        <p:spPr>
+          <a:xfrm xmlns:a="http://schemas.openxmlformats.org/drawingml/2006/main">
+            <a:off x="1162050" y="4314825"/>
+            <a:ext cx="400050" cy="400050"/>
           </a:xfrm>
           <a:prstGeom xmlns:a="http://schemas.openxmlformats.org/drawingml/2006/main" prst="rect">
             <a:avLst/>
@@ -8758,9 +8766,9 @@
           <a:lstStyle xmlns:a="http://schemas.openxmlformats.org/drawingml/2006/main"/>
           <a:p xmlns:a="http://schemas.openxmlformats.org/drawingml/2006/main">
             <a:pPr algn="ctr">
-              <a:defRPr sz="1350" b="1">
-                <a:solidFill>
-                  <a:srgbClr val="FFFFFF"/>
+              <a:defRPr sz="1125" b="1">
+                <a:solidFill>
+                  <a:srgbClr val="2C6E73"/>
                 </a:solidFill>
                 <a:latin typeface="Arial"/>
                 <a:ea typeface="Arial"/>
@@ -8768,9 +8776,9 @@
               </a:defRPr>
             </a:pPr>
             <a:r>
-              <a:rPr sz="1350" b="1">
-                <a:solidFill>
-                  <a:srgbClr val="FFFFFF"/>
+              <a:rPr sz="1125" b="1">
+                <a:solidFill>
+                  <a:srgbClr val="2C6E73"/>
                 </a:solidFill>
                 <a:latin typeface="Arial"/>
                 <a:ea typeface="Arial"/>
@@ -8786,19 +8794,19 @@
           <p:cNvPr id="22" name="">
             <a:extLst xmlns:a="http://schemas.openxmlformats.org/drawingml/2006/main">
               <a:ext uri="{FF2B5EF4-FFF2-40B4-BE49-F238E27FC236}">
-                <a16:creationId xmlns:a16="http://schemas.microsoft.com/office/drawing/2014/main" id="{A9D9F498-0727-4249-8375-C246FC982745}"/>
-              </a:ext>
-            </a:extLst>
-          </p:cNvPr>
-          <p:cNvSpPr>
-            <a:spLocks xmlns:a="http://schemas.openxmlformats.org/drawingml/2006/main" noGrp="1"/>
-          </p:cNvSpPr>
-          <p:nvPr/>
-        </p:nvSpPr>
-        <p:spPr>
-          <a:xfrm xmlns:a="http://schemas.openxmlformats.org/drawingml/2006/main">
-            <a:off x="1714500" y="4410075"/>
-            <a:ext cx="9429750" cy="609600"/>
+                <a16:creationId xmlns:a16="http://schemas.microsoft.com/office/drawing/2014/main" id="{EDAF1339-C228-4023-92AF-25CB062D44E6}"/>
+              </a:ext>
+            </a:extLst>
+          </p:cNvPr>
+          <p:cNvSpPr>
+            <a:spLocks xmlns:a="http://schemas.openxmlformats.org/drawingml/2006/main" noGrp="1"/>
+          </p:cNvSpPr>
+          <p:nvPr/>
+        </p:nvSpPr>
+        <p:spPr>
+          <a:xfrm xmlns:a="http://schemas.openxmlformats.org/drawingml/2006/main">
+            <a:off x="1714500" y="4229100"/>
+            <a:ext cx="9525000" cy="638175"/>
           </a:xfrm>
           <a:prstGeom xmlns:a="http://schemas.openxmlformats.org/drawingml/2006/main" prst="rect">
             <a:avLst/>
@@ -8815,9 +8823,9 @@
           <a:lstStyle xmlns:a="http://schemas.openxmlformats.org/drawingml/2006/main"/>
           <a:p xmlns:a="http://schemas.openxmlformats.org/drawingml/2006/main">
             <a:pPr algn="l">
-              <a:defRPr sz="1500" b="1">
-                <a:solidFill>
-                  <a:srgbClr val="2F785D"/>
+              <a:defRPr sz="1575" b="0">
+                <a:solidFill>
+                  <a:srgbClr val="17253A"/>
                 </a:solidFill>
                 <a:latin typeface="Arial"/>
                 <a:ea typeface="Arial"/>
@@ -8825,15 +8833,161 @@
               </a:defRPr>
             </a:pPr>
             <a:r>
-              <a:rPr sz="1500" b="1">
+              <a:rPr sz="1575" b="0">
+                <a:solidFill>
+                  <a:srgbClr val="17253A"/>
+                </a:solidFill>
+                <a:latin typeface="Arial"/>
+                <a:ea typeface="Arial"/>
+                <a:cs typeface="Arial"/>
+              </a:rPr>
+              <a:t>160 + 80</a:t>
+            </a:r>
+          </a:p>
+        </p:txBody>
+      </p:sp>
+      <p:sp>
+        <p:nvSpPr>
+          <p:cNvPr id="23" name="">
+            <a:extLst xmlns:a="http://schemas.openxmlformats.org/drawingml/2006/main">
+              <a:ext uri="{FF2B5EF4-FFF2-40B4-BE49-F238E27FC236}">
+                <a16:creationId xmlns:a16="http://schemas.microsoft.com/office/drawing/2014/main" id="{1C7B003B-4241-48D8-A072-657F3CBCCD2F}"/>
+              </a:ext>
+            </a:extLst>
+          </p:cNvPr>
+          <p:cNvSpPr>
+            <a:spLocks xmlns:a="http://schemas.openxmlformats.org/drawingml/2006/main" noGrp="1"/>
+          </p:cNvSpPr>
+          <p:nvPr/>
+        </p:nvSpPr>
+        <p:spPr>
+          <a:xfrm xmlns:a="http://schemas.openxmlformats.org/drawingml/2006/main">
+            <a:off x="1714500" y="4886325"/>
+            <a:ext cx="9334500" cy="9525"/>
+          </a:xfrm>
+          <a:prstGeom xmlns:a="http://schemas.openxmlformats.org/drawingml/2006/main" prst="rect">
+            <a:avLst/>
+          </a:prstGeom>
+          <a:solidFill xmlns:a="http://schemas.openxmlformats.org/drawingml/2006/main">
+            <a:srgbClr val="D9E0E6"/>
+          </a:solidFill>
+          <a:ln xmlns:a="http://schemas.openxmlformats.org/drawingml/2006/main" w="0">
+            <a:solidFill>
+              <a:srgbClr val="D9E0E6"/>
+            </a:solidFill>
+          </a:ln>
+        </p:spPr>
+      </p:sp>
+      <p:sp>
+        <p:nvSpPr>
+          <p:cNvPr id="24" name="">
+            <a:extLst xmlns:a="http://schemas.openxmlformats.org/drawingml/2006/main">
+              <a:ext uri="{FF2B5EF4-FFF2-40B4-BE49-F238E27FC236}">
+                <a16:creationId xmlns:a16="http://schemas.microsoft.com/office/drawing/2014/main" id="{402CB304-0B01-46DE-8012-64D34B0533ED}"/>
+              </a:ext>
+            </a:extLst>
+          </p:cNvPr>
+          <p:cNvSpPr>
+            <a:spLocks xmlns:a="http://schemas.openxmlformats.org/drawingml/2006/main" noGrp="1"/>
+          </p:cNvSpPr>
+          <p:nvPr/>
+        </p:nvSpPr>
+        <p:spPr>
+          <a:xfrm xmlns:a="http://schemas.openxmlformats.org/drawingml/2006/main">
+            <a:off x="1162050" y="5019675"/>
+            <a:ext cx="400050" cy="400050"/>
+          </a:xfrm>
+          <a:prstGeom xmlns:a="http://schemas.openxmlformats.org/drawingml/2006/main" prst="rect">
+            <a:avLst/>
+          </a:prstGeom>
+          <a:noFill xmlns:a="http://schemas.openxmlformats.org/drawingml/2006/main"/>
+          <a:ln xmlns:a="http://schemas.openxmlformats.org/drawingml/2006/main" w="0">
+            <a:noFill/>
+          </a:ln>
+        </p:spPr>
+        <p:txBody>
+          <a:bodyPr xmlns:a="http://schemas.openxmlformats.org/drawingml/2006/main" anchor="ctr">
+            <a:normAutofit fontScale="100000"/>
+          </a:bodyPr>
+          <a:lstStyle xmlns:a="http://schemas.openxmlformats.org/drawingml/2006/main"/>
+          <a:p xmlns:a="http://schemas.openxmlformats.org/drawingml/2006/main">
+            <a:pPr algn="ctr">
+              <a:defRPr sz="1125" b="1">
                 <a:solidFill>
                   <a:srgbClr val="2F785D"/>
                 </a:solidFill>
                 <a:latin typeface="Arial"/>
                 <a:ea typeface="Arial"/>
                 <a:cs typeface="Arial"/>
+              </a:defRPr>
+            </a:pPr>
+            <a:r>
+              <a:rPr sz="1125" b="1">
+                <a:solidFill>
+                  <a:srgbClr val="2F785D"/>
+                </a:solidFill>
+                <a:latin typeface="Arial"/>
+                <a:ea typeface="Arial"/>
+                <a:cs typeface="Arial"/>
               </a:rPr>
-              <a:t>Check the result: Check the result and record a specific next step.</a:t>
+              <a:t>5</a:t>
+            </a:r>
+          </a:p>
+        </p:txBody>
+      </p:sp>
+      <p:sp>
+        <p:nvSpPr>
+          <p:cNvPr id="25" name="">
+            <a:extLst xmlns:a="http://schemas.openxmlformats.org/drawingml/2006/main">
+              <a:ext uri="{FF2B5EF4-FFF2-40B4-BE49-F238E27FC236}">
+                <a16:creationId xmlns:a16="http://schemas.microsoft.com/office/drawing/2014/main" id="{150C314A-CF18-4D86-9D13-1C511F64A599}"/>
+              </a:ext>
+            </a:extLst>
+          </p:cNvPr>
+          <p:cNvSpPr>
+            <a:spLocks xmlns:a="http://schemas.openxmlformats.org/drawingml/2006/main" noGrp="1"/>
+          </p:cNvSpPr>
+          <p:nvPr/>
+        </p:nvSpPr>
+        <p:spPr>
+          <a:xfrm xmlns:a="http://schemas.openxmlformats.org/drawingml/2006/main">
+            <a:off x="1714500" y="4933950"/>
+            <a:ext cx="9525000" cy="638175"/>
+          </a:xfrm>
+          <a:prstGeom xmlns:a="http://schemas.openxmlformats.org/drawingml/2006/main" prst="rect">
+            <a:avLst/>
+          </a:prstGeom>
+          <a:noFill xmlns:a="http://schemas.openxmlformats.org/drawingml/2006/main"/>
+          <a:ln xmlns:a="http://schemas.openxmlformats.org/drawingml/2006/main" w="0">
+            <a:noFill/>
+          </a:ln>
+        </p:spPr>
+        <p:txBody>
+          <a:bodyPr xmlns:a="http://schemas.openxmlformats.org/drawingml/2006/main" anchor="ctr">
+            <a:normAutofit fontScale="100000"/>
+          </a:bodyPr>
+          <a:lstStyle xmlns:a="http://schemas.openxmlformats.org/drawingml/2006/main"/>
+          <a:p xmlns:a="http://schemas.openxmlformats.org/drawingml/2006/main">
+            <a:pPr algn="l">
+              <a:defRPr sz="1575" b="1">
+                <a:solidFill>
+                  <a:srgbClr val="2F785D"/>
+                </a:solidFill>
+                <a:latin typeface="Arial"/>
+                <a:ea typeface="Arial"/>
+                <a:cs typeface="Arial"/>
+              </a:defRPr>
+            </a:pPr>
+            <a:r>
+              <a:rPr sz="1575" b="1">
+                <a:solidFill>
+                  <a:srgbClr val="2F785D"/>
+                </a:solidFill>
+                <a:latin typeface="Arial"/>
+                <a:ea typeface="Arial"/>
+                <a:cs typeface="Arial"/>
+              </a:rPr>
+              <a:t>240</a:t>
             </a:r>
           </a:p>
         </p:txBody>
@@ -8841,7 +8995,7 @@
     </p:spTree>
     <p:extLst>
       <p:ext uri="{BB962C8B-B14F-4D97-AF65-F5344CB8AC3E}">
-        <p14:creationId xmlns:p14="http://schemas.microsoft.com/office/powerpoint/2010/main" val="1753484209"/>
+        <p14:creationId xmlns:p14="http://schemas.microsoft.com/office/powerpoint/2010/main" val="1935186079"/>
       </p:ext>
     </p:extLst>
   </p:cSld>
@@ -9078,6 +9232,51 @@
                       </p:childTnLst>
                     </p:cTn>
                   </p:par>
+                  <p:par>
+                    <p:cTn id="23" fill="hold">
+                      <p:stCondLst>
+                        <p:cond delay="indefinite"/>
+                      </p:stCondLst>
+                      <p:childTnLst>
+                        <p:par>
+                          <p:cTn id="24" fill="hold">
+                            <p:stCondLst>
+                              <p:cond delay="0"/>
+                            </p:stCondLst>
+                            <p:childTnLst>
+                              <p:par>
+                                <p:cTn id="25" presetID="1" presetClass="entr" presetSubtype="0" fill="hold" grpId="0" nodeType="clickEffect">
+                                  <p:stCondLst>
+                                    <p:cond delay="0"/>
+                                  </p:stCondLst>
+                                  <p:childTnLst>
+                                    <p:set>
+                                      <p:cBhvr>
+                                        <p:cTn id="26" dur="1" fill="hold">
+                                          <p:stCondLst>
+                                            <p:cond delay="0"/>
+                                          </p:stCondLst>
+                                        </p:cTn>
+                                        <p:tgtEl>
+                                          <p:spTgt spid="25"/>
+                                        </p:tgtEl>
+                                        <p:attrNameLst>
+                                          <p:attrName>style.visibility</p:attrName>
+                                        </p:attrNameLst>
+                                      </p:cBhvr>
+                                      <p:to>
+                                        <p:strVal val="visible"/>
+                                      </p:to>
+                                    </p:set>
+                                  </p:childTnLst>
+                                </p:cTn>
+                              </p:par>
+                            </p:childTnLst>
+                          </p:cTn>
+                        </p:par>
+                      </p:childTnLst>
+                    </p:cTn>
+                  </p:par>
                 </p:childTnLst>
               </p:cTn>
               <p:prevCondLst>
@@ -9105,6 +9304,7 @@
       <p:bldP spid="16" grpId="0"/>
       <p:bldP spid="19" grpId="0"/>
       <p:bldP spid="22" grpId="0"/>
+      <p:bldP spid="25" grpId="0"/>
     </p:bldLst>
   </p:timing>
 </p:sld>
@@ -9134,7 +9334,7 @@
           <p:cNvPr id="15" name="">
             <a:extLst xmlns:a="http://schemas.openxmlformats.org/drawingml/2006/main">
               <a:ext uri="{FF2B5EF4-FFF2-40B4-BE49-F238E27FC236}">
-                <a16:creationId xmlns:a16="http://schemas.microsoft.com/office/drawing/2014/main" id="{D7E58C6E-CFC7-416A-A5C1-6CC750A454AF}"/>
+                <a16:creationId xmlns:a16="http://schemas.microsoft.com/office/drawing/2014/main" id="{FA435E5A-960B-40B3-8DE3-220DD7334314}"/>
               </a:ext>
             </a:extLst>
           </p:cNvPr>
@@ -9166,7 +9366,7 @@
           <p:cNvPr id="2" name="">
             <a:extLst xmlns:a="http://schemas.openxmlformats.org/drawingml/2006/main">
               <a:ext uri="{FF2B5EF4-FFF2-40B4-BE49-F238E27FC236}">
-                <a16:creationId xmlns:a16="http://schemas.microsoft.com/office/drawing/2014/main" id="{6BAD5A63-DE14-422A-99BB-8572A464AC02}"/>
+                <a16:creationId xmlns:a16="http://schemas.microsoft.com/office/drawing/2014/main" id="{F0180CA1-D646-440C-81CF-6A41D59EBC90}"/>
               </a:ext>
             </a:extLst>
           </p:cNvPr>
@@ -9223,7 +9423,7 @@
           <p:cNvPr id="3" name="">
             <a:extLst xmlns:a="http://schemas.openxmlformats.org/drawingml/2006/main">
               <a:ext uri="{FF2B5EF4-FFF2-40B4-BE49-F238E27FC236}">
-                <a16:creationId xmlns:a16="http://schemas.microsoft.com/office/drawing/2014/main" id="{B794FD5F-95CE-4098-AA98-23F6530E6C2B}"/>
+                <a16:creationId xmlns:a16="http://schemas.microsoft.com/office/drawing/2014/main" id="{7DF8B020-6EFC-4604-BC4F-260A529C3829}"/>
               </a:ext>
             </a:extLst>
           </p:cNvPr>
@@ -9255,7 +9455,7 @@
           <p:cNvPr id="4" name="">
             <a:extLst xmlns:a="http://schemas.openxmlformats.org/drawingml/2006/main">
               <a:ext uri="{FF2B5EF4-FFF2-40B4-BE49-F238E27FC236}">
-                <a16:creationId xmlns:a16="http://schemas.microsoft.com/office/drawing/2014/main" id="{6F765CC3-2793-4CD3-BC70-89619251D435}"/>
+                <a16:creationId xmlns:a16="http://schemas.microsoft.com/office/drawing/2014/main" id="{DD7B6E8B-37F2-400A-A3F2-E77D62D5E2B8}"/>
               </a:ext>
             </a:extLst>
           </p:cNvPr>
@@ -9312,7 +9512,7 @@
           <p:cNvPr id="5" name="">
             <a:extLst xmlns:a="http://schemas.openxmlformats.org/drawingml/2006/main">
               <a:ext uri="{FF2B5EF4-FFF2-40B4-BE49-F238E27FC236}">
-                <a16:creationId xmlns:a16="http://schemas.microsoft.com/office/drawing/2014/main" id="{72AAEA79-E0B5-4E10-BEE6-031A0B04AB28}"/>
+                <a16:creationId xmlns:a16="http://schemas.microsoft.com/office/drawing/2014/main" id="{E84B9037-6AE5-42EF-B77D-646AC7EB6399}"/>
               </a:ext>
             </a:extLst>
           </p:cNvPr>
@@ -9369,7 +9569,7 @@
           <p:cNvPr id="6" name="">
             <a:extLst xmlns:a="http://schemas.openxmlformats.org/drawingml/2006/main">
               <a:ext uri="{FF2B5EF4-FFF2-40B4-BE49-F238E27FC236}">
-                <a16:creationId xmlns:a16="http://schemas.microsoft.com/office/drawing/2014/main" id="{AB99EE16-1B19-482A-858F-0C866184F705}"/>
+                <a16:creationId xmlns:a16="http://schemas.microsoft.com/office/drawing/2014/main" id="{8FBC34D5-497B-4642-8CE9-9BCCBDF40E16}"/>
               </a:ext>
             </a:extLst>
           </p:cNvPr>
@@ -9426,7 +9626,7 @@
           <p:cNvPr id="7" name="">
             <a:extLst xmlns:a="http://schemas.openxmlformats.org/drawingml/2006/main">
               <a:ext uri="{FF2B5EF4-FFF2-40B4-BE49-F238E27FC236}">
-                <a16:creationId xmlns:a16="http://schemas.microsoft.com/office/drawing/2014/main" id="{30CEB591-25AD-439D-94CF-7996B2D2BE11}"/>
+                <a16:creationId xmlns:a16="http://schemas.microsoft.com/office/drawing/2014/main" id="{584FC75D-EFB3-4B83-9989-60CF1207924C}"/>
               </a:ext>
             </a:extLst>
           </p:cNvPr>
@@ -9458,7 +9658,7 @@
           <p:cNvPr id="8" name="">
             <a:extLst xmlns:a="http://schemas.openxmlformats.org/drawingml/2006/main">
               <a:ext uri="{FF2B5EF4-FFF2-40B4-BE49-F238E27FC236}">
-                <a16:creationId xmlns:a16="http://schemas.microsoft.com/office/drawing/2014/main" id="{245C6ADD-C23F-488F-82C3-713FEFB41702}"/>
+                <a16:creationId xmlns:a16="http://schemas.microsoft.com/office/drawing/2014/main" id="{BB3A3953-0D5D-4218-AAAC-185ABF9DCE08}"/>
               </a:ext>
             </a:extLst>
           </p:cNvPr>
@@ -9515,7 +9715,7 @@
           <p:cNvPr id="9" name="">
             <a:extLst xmlns:a="http://schemas.openxmlformats.org/drawingml/2006/main">
               <a:ext uri="{FF2B5EF4-FFF2-40B4-BE49-F238E27FC236}">
-                <a16:creationId xmlns:a16="http://schemas.microsoft.com/office/drawing/2014/main" id="{8DC34674-E3F8-4C70-9EEC-BD5CA1AA35A1}"/>
+                <a16:creationId xmlns:a16="http://schemas.microsoft.com/office/drawing/2014/main" id="{AAB2FA6E-405C-4D01-BFA8-E5476394D24E}"/>
               </a:ext>
             </a:extLst>
           </p:cNvPr>
@@ -9572,7 +9772,7 @@
           <p:cNvPr id="10" name="">
             <a:extLst xmlns:a="http://schemas.openxmlformats.org/drawingml/2006/main">
               <a:ext uri="{FF2B5EF4-FFF2-40B4-BE49-F238E27FC236}">
-                <a16:creationId xmlns:a16="http://schemas.microsoft.com/office/drawing/2014/main" id="{A89A3426-5AD7-40A6-8282-1C45703D7F8E}"/>
+                <a16:creationId xmlns:a16="http://schemas.microsoft.com/office/drawing/2014/main" id="{DA107461-0E65-42C6-9BBC-CADAB2761CE5}"/>
               </a:ext>
             </a:extLst>
           </p:cNvPr>
@@ -9629,7 +9829,7 @@
           <p:cNvPr id="11" name="">
             <a:extLst xmlns:a="http://schemas.openxmlformats.org/drawingml/2006/main">
               <a:ext uri="{FF2B5EF4-FFF2-40B4-BE49-F238E27FC236}">
-                <a16:creationId xmlns:a16="http://schemas.microsoft.com/office/drawing/2014/main" id="{C7D2C5AD-4FBD-4B68-B983-08A472546FFD}"/>
+                <a16:creationId xmlns:a16="http://schemas.microsoft.com/office/drawing/2014/main" id="{773D9F65-DCD2-4ED2-803A-82BCB765C0EA}"/>
               </a:ext>
             </a:extLst>
           </p:cNvPr>
@@ -9686,7 +9886,7 @@
           <p:cNvPr id="12" name="">
             <a:extLst xmlns:a="http://schemas.openxmlformats.org/drawingml/2006/main">
               <a:ext uri="{FF2B5EF4-FFF2-40B4-BE49-F238E27FC236}">
-                <a16:creationId xmlns:a16="http://schemas.microsoft.com/office/drawing/2014/main" id="{5606A123-CCB1-423C-8825-BBFC1C28DE1D}"/>
+                <a16:creationId xmlns:a16="http://schemas.microsoft.com/office/drawing/2014/main" id="{204F0C72-9C9C-46A7-A95C-E9283C42B08F}"/>
               </a:ext>
             </a:extLst>
           </p:cNvPr>
@@ -9718,7 +9918,7 @@
           <p:cNvPr id="13" name="">
             <a:extLst xmlns:a="http://schemas.openxmlformats.org/drawingml/2006/main">
               <a:ext uri="{FF2B5EF4-FFF2-40B4-BE49-F238E27FC236}">
-                <a16:creationId xmlns:a16="http://schemas.microsoft.com/office/drawing/2014/main" id="{05890121-3AFB-4489-AC66-0E16C48EA95D}"/>
+                <a16:creationId xmlns:a16="http://schemas.microsoft.com/office/drawing/2014/main" id="{0BC3D738-C199-4330-938A-A5CC0D521F22}"/>
               </a:ext>
             </a:extLst>
           </p:cNvPr>
@@ -9775,7 +9975,7 @@
           <p:cNvPr id="14" name="">
             <a:extLst xmlns:a="http://schemas.openxmlformats.org/drawingml/2006/main">
               <a:ext uri="{FF2B5EF4-FFF2-40B4-BE49-F238E27FC236}">
-                <a16:creationId xmlns:a16="http://schemas.microsoft.com/office/drawing/2014/main" id="{0E05D0BC-404C-4F08-815C-1B77F2FD8ED6}"/>
+                <a16:creationId xmlns:a16="http://schemas.microsoft.com/office/drawing/2014/main" id="{F177B7B7-D9B7-4FEF-8202-2592FA75BFEC}"/>
               </a:ext>
             </a:extLst>
           </p:cNvPr>
@@ -9830,7 +10030,7 @@
     </p:spTree>
     <p:extLst>
       <p:ext uri="{BB962C8B-B14F-4D97-AF65-F5344CB8AC3E}">
-        <p14:creationId xmlns:p14="http://schemas.microsoft.com/office/powerpoint/2010/main" val="1917347128"/>
+        <p14:creationId xmlns:p14="http://schemas.microsoft.com/office/powerpoint/2010/main" val="1941416284"/>
       </p:ext>
     </p:extLst>
   </p:cSld>
@@ -10031,7 +10231,7 @@
           <p:cNvPr id="16" name="">
             <a:extLst xmlns:a="http://schemas.openxmlformats.org/drawingml/2006/main">
               <a:ext uri="{FF2B5EF4-FFF2-40B4-BE49-F238E27FC236}">
-                <a16:creationId xmlns:a16="http://schemas.microsoft.com/office/drawing/2014/main" id="{2010DE26-D6F0-467A-880F-1ABF6E9CCD88}"/>
+                <a16:creationId xmlns:a16="http://schemas.microsoft.com/office/drawing/2014/main" id="{F7682C95-C633-4E10-ADA6-C3D2A64350EA}"/>
               </a:ext>
             </a:extLst>
           </p:cNvPr>
@@ -10063,7 +10263,7 @@
           <p:cNvPr id="2" name="">
             <a:extLst xmlns:a="http://schemas.openxmlformats.org/drawingml/2006/main">
               <a:ext uri="{FF2B5EF4-FFF2-40B4-BE49-F238E27FC236}">
-                <a16:creationId xmlns:a16="http://schemas.microsoft.com/office/drawing/2014/main" id="{C6025744-D9AE-4E0B-A053-29909D549BBA}"/>
+                <a16:creationId xmlns:a16="http://schemas.microsoft.com/office/drawing/2014/main" id="{D15AEE48-82B6-4085-B817-2C18075B356F}"/>
               </a:ext>
             </a:extLst>
           </p:cNvPr>
@@ -10120,7 +10320,7 @@
           <p:cNvPr id="3" name="">
             <a:extLst xmlns:a="http://schemas.openxmlformats.org/drawingml/2006/main">
               <a:ext uri="{FF2B5EF4-FFF2-40B4-BE49-F238E27FC236}">
-                <a16:creationId xmlns:a16="http://schemas.microsoft.com/office/drawing/2014/main" id="{4BC5CD9C-0C35-4D95-9C49-6FB4D98DF0DA}"/>
+                <a16:creationId xmlns:a16="http://schemas.microsoft.com/office/drawing/2014/main" id="{AB6EF793-6A67-4720-988D-FF658459DC0F}"/>
               </a:ext>
             </a:extLst>
           </p:cNvPr>
@@ -10152,7 +10352,7 @@
           <p:cNvPr id="4" name="">
             <a:extLst xmlns:a="http://schemas.openxmlformats.org/drawingml/2006/main">
               <a:ext uri="{FF2B5EF4-FFF2-40B4-BE49-F238E27FC236}">
-                <a16:creationId xmlns:a16="http://schemas.microsoft.com/office/drawing/2014/main" id="{1C420EA5-CCAD-45B5-AC1C-41AA76B8D1B4}"/>
+                <a16:creationId xmlns:a16="http://schemas.microsoft.com/office/drawing/2014/main" id="{42FB3AE3-8090-49C8-933A-C1C85AB91913}"/>
               </a:ext>
             </a:extLst>
           </p:cNvPr>
@@ -10209,7 +10409,7 @@
           <p:cNvPr id="5" name="">
             <a:extLst xmlns:a="http://schemas.openxmlformats.org/drawingml/2006/main">
               <a:ext uri="{FF2B5EF4-FFF2-40B4-BE49-F238E27FC236}">
-                <a16:creationId xmlns:a16="http://schemas.microsoft.com/office/drawing/2014/main" id="{C2D9EA8F-235B-410F-A941-D2EBE0012488}"/>
+                <a16:creationId xmlns:a16="http://schemas.microsoft.com/office/drawing/2014/main" id="{E652BBE7-939E-4253-A288-167647538ACD}"/>
               </a:ext>
             </a:extLst>
           </p:cNvPr>
@@ -10266,7 +10466,7 @@
           <p:cNvPr id="6" name="">
             <a:extLst xmlns:a="http://schemas.openxmlformats.org/drawingml/2006/main">
               <a:ext uri="{FF2B5EF4-FFF2-40B4-BE49-F238E27FC236}">
-                <a16:creationId xmlns:a16="http://schemas.microsoft.com/office/drawing/2014/main" id="{6FC9B686-4EA3-43DD-9536-69B20255F757}"/>
+                <a16:creationId xmlns:a16="http://schemas.microsoft.com/office/drawing/2014/main" id="{143B3600-9B9A-470E-A557-DCEC2CD866DB}"/>
               </a:ext>
             </a:extLst>
           </p:cNvPr>
@@ -10323,7 +10523,7 @@
           <p:cNvPr id="7" name="">
             <a:extLst xmlns:a="http://schemas.openxmlformats.org/drawingml/2006/main">
               <a:ext uri="{FF2B5EF4-FFF2-40B4-BE49-F238E27FC236}">
-                <a16:creationId xmlns:a16="http://schemas.microsoft.com/office/drawing/2014/main" id="{5C46AE2F-9DDC-4AA0-B96E-29BED4F043CF}"/>
+                <a16:creationId xmlns:a16="http://schemas.microsoft.com/office/drawing/2014/main" id="{00338618-8FD8-4F44-B265-B953012A2A7C}"/>
               </a:ext>
             </a:extLst>
           </p:cNvPr>
@@ -10355,7 +10555,7 @@
           <p:cNvPr id="8" name="">
             <a:extLst xmlns:a="http://schemas.openxmlformats.org/drawingml/2006/main">
               <a:ext uri="{FF2B5EF4-FFF2-40B4-BE49-F238E27FC236}">
-                <a16:creationId xmlns:a16="http://schemas.microsoft.com/office/drawing/2014/main" id="{E5A25A6F-78D8-47E4-BFC6-96C97B444C8E}"/>
+                <a16:creationId xmlns:a16="http://schemas.microsoft.com/office/drawing/2014/main" id="{DD0F6057-A8BC-4E74-BD57-47006187E8F9}"/>
               </a:ext>
             </a:extLst>
           </p:cNvPr>
@@ -10412,7 +10612,7 @@
           <p:cNvPr id="9" name="">
             <a:extLst xmlns:a="http://schemas.openxmlformats.org/drawingml/2006/main">
               <a:ext uri="{FF2B5EF4-FFF2-40B4-BE49-F238E27FC236}">
-                <a16:creationId xmlns:a16="http://schemas.microsoft.com/office/drawing/2014/main" id="{310776B6-B94C-4D79-91BB-A6EBB77557DB}"/>
+                <a16:creationId xmlns:a16="http://schemas.microsoft.com/office/drawing/2014/main" id="{5E837927-24E8-453A-AFBB-A5A5B0E17F89}"/>
               </a:ext>
             </a:extLst>
           </p:cNvPr>
@@ -10469,7 +10669,7 @@
           <p:cNvPr id="10" name="">
             <a:extLst xmlns:a="http://schemas.openxmlformats.org/drawingml/2006/main">
               <a:ext uri="{FF2B5EF4-FFF2-40B4-BE49-F238E27FC236}">
-                <a16:creationId xmlns:a16="http://schemas.microsoft.com/office/drawing/2014/main" id="{5A9072C6-B425-44C1-9B7B-11DB338C926F}"/>
+                <a16:creationId xmlns:a16="http://schemas.microsoft.com/office/drawing/2014/main" id="{20EEFDE6-9265-466E-9B4C-14D3B331D4D0}"/>
               </a:ext>
             </a:extLst>
           </p:cNvPr>
@@ -10526,7 +10726,7 @@
           <p:cNvPr id="11" name="">
             <a:extLst xmlns:a="http://schemas.openxmlformats.org/drawingml/2006/main">
               <a:ext uri="{FF2B5EF4-FFF2-40B4-BE49-F238E27FC236}">
-                <a16:creationId xmlns:a16="http://schemas.microsoft.com/office/drawing/2014/main" id="{304F7B8F-8E7A-494B-BED3-49095C9636A3}"/>
+                <a16:creationId xmlns:a16="http://schemas.microsoft.com/office/drawing/2014/main" id="{A4CCAD63-A34D-47F3-BA04-02EB543FFBF7}"/>
               </a:ext>
             </a:extLst>
           </p:cNvPr>
@@ -10583,7 +10783,7 @@
           <p:cNvPr id="12" name="">
             <a:extLst xmlns:a="http://schemas.openxmlformats.org/drawingml/2006/main">
               <a:ext uri="{FF2B5EF4-FFF2-40B4-BE49-F238E27FC236}">
-                <a16:creationId xmlns:a16="http://schemas.microsoft.com/office/drawing/2014/main" id="{44D9C254-A193-4E9E-BD32-72BD454F9960}"/>
+                <a16:creationId xmlns:a16="http://schemas.microsoft.com/office/drawing/2014/main" id="{7E686486-97C8-4C1D-B50A-FE30450406F8}"/>
               </a:ext>
             </a:extLst>
           </p:cNvPr>
@@ -10640,7 +10840,7 @@
           <p:cNvPr id="13" name="">
             <a:extLst xmlns:a="http://schemas.openxmlformats.org/drawingml/2006/main">
               <a:ext uri="{FF2B5EF4-FFF2-40B4-BE49-F238E27FC236}">
-                <a16:creationId xmlns:a16="http://schemas.microsoft.com/office/drawing/2014/main" id="{C2E7DF30-4F5F-48A9-9112-2A4D8D79CB26}"/>
+                <a16:creationId xmlns:a16="http://schemas.microsoft.com/office/drawing/2014/main" id="{CA4259EA-EFC7-406B-A41D-B528E8C1E44F}"/>
               </a:ext>
             </a:extLst>
           </p:cNvPr>
@@ -10697,7 +10897,7 @@
           <p:cNvPr id="14" name="">
             <a:extLst xmlns:a="http://schemas.openxmlformats.org/drawingml/2006/main">
               <a:ext uri="{FF2B5EF4-FFF2-40B4-BE49-F238E27FC236}">
-                <a16:creationId xmlns:a16="http://schemas.microsoft.com/office/drawing/2014/main" id="{2B886668-BE15-4A4A-86DB-04414E702212}"/>
+                <a16:creationId xmlns:a16="http://schemas.microsoft.com/office/drawing/2014/main" id="{18CB7B98-E688-4247-B60B-A78CFD7C1835}"/>
               </a:ext>
             </a:extLst>
           </p:cNvPr>
@@ -10754,7 +10954,7 @@
           <p:cNvPr id="15" name="">
             <a:extLst xmlns:a="http://schemas.openxmlformats.org/drawingml/2006/main">
               <a:ext uri="{FF2B5EF4-FFF2-40B4-BE49-F238E27FC236}">
-                <a16:creationId xmlns:a16="http://schemas.microsoft.com/office/drawing/2014/main" id="{2705602A-6592-46C4-9017-5D367C47247B}"/>
+                <a16:creationId xmlns:a16="http://schemas.microsoft.com/office/drawing/2014/main" id="{CC70D19D-80CB-48FC-A53B-CEB4D32ECC50}"/>
               </a:ext>
             </a:extLst>
           </p:cNvPr>
@@ -10809,7 +11009,7 @@
     </p:spTree>
     <p:extLst>
       <p:ext uri="{BB962C8B-B14F-4D97-AF65-F5344CB8AC3E}">
-        <p14:creationId xmlns:p14="http://schemas.microsoft.com/office/powerpoint/2010/main" val="1444138649"/>
+        <p14:creationId xmlns:p14="http://schemas.microsoft.com/office/powerpoint/2010/main" val="1496137906"/>
       </p:ext>
     </p:extLst>
   </p:cSld>
@@ -10964,7 +11164,7 @@
           <p:cNvPr id="16" name="">
             <a:extLst xmlns:a="http://schemas.openxmlformats.org/drawingml/2006/main">
               <a:ext uri="{FF2B5EF4-FFF2-40B4-BE49-F238E27FC236}">
-                <a16:creationId xmlns:a16="http://schemas.microsoft.com/office/drawing/2014/main" id="{9C89B294-1789-4485-831A-DE4EC88C12BC}"/>
+                <a16:creationId xmlns:a16="http://schemas.microsoft.com/office/drawing/2014/main" id="{3D309DB0-059F-47EF-BCF0-EF8B42C32248}"/>
               </a:ext>
             </a:extLst>
           </p:cNvPr>
@@ -10996,7 +11196,7 @@
           <p:cNvPr id="2" name="">
             <a:extLst xmlns:a="http://schemas.openxmlformats.org/drawingml/2006/main">
               <a:ext uri="{FF2B5EF4-FFF2-40B4-BE49-F238E27FC236}">
-                <a16:creationId xmlns:a16="http://schemas.microsoft.com/office/drawing/2014/main" id="{5195DC2E-BF51-4262-BC95-327BC87915A0}"/>
+                <a16:creationId xmlns:a16="http://schemas.microsoft.com/office/drawing/2014/main" id="{491371F3-B45F-4F5F-B2EC-33DD786C084B}"/>
               </a:ext>
             </a:extLst>
           </p:cNvPr>
@@ -11053,7 +11253,7 @@
           <p:cNvPr id="3" name="">
             <a:extLst xmlns:a="http://schemas.openxmlformats.org/drawingml/2006/main">
               <a:ext uri="{FF2B5EF4-FFF2-40B4-BE49-F238E27FC236}">
-                <a16:creationId xmlns:a16="http://schemas.microsoft.com/office/drawing/2014/main" id="{2D81983A-27FD-4CDC-95BC-2E252D2CF3CF}"/>
+                <a16:creationId xmlns:a16="http://schemas.microsoft.com/office/drawing/2014/main" id="{A499DB4C-5AE6-4E8E-9E42-11F42A15E706}"/>
               </a:ext>
             </a:extLst>
           </p:cNvPr>
@@ -11085,7 +11285,7 @@
           <p:cNvPr id="4" name="">
             <a:extLst xmlns:a="http://schemas.openxmlformats.org/drawingml/2006/main">
               <a:ext uri="{FF2B5EF4-FFF2-40B4-BE49-F238E27FC236}">
-                <a16:creationId xmlns:a16="http://schemas.microsoft.com/office/drawing/2014/main" id="{02AB480F-CEBE-4C9D-BCB5-4DD9CF4FA3BA}"/>
+                <a16:creationId xmlns:a16="http://schemas.microsoft.com/office/drawing/2014/main" id="{971D0215-9E40-413F-BBC2-3B0C7FB0EAD3}"/>
               </a:ext>
             </a:extLst>
           </p:cNvPr>
@@ -11142,7 +11342,7 @@
           <p:cNvPr id="5" name="">
             <a:extLst xmlns:a="http://schemas.openxmlformats.org/drawingml/2006/main">
               <a:ext uri="{FF2B5EF4-FFF2-40B4-BE49-F238E27FC236}">
-                <a16:creationId xmlns:a16="http://schemas.microsoft.com/office/drawing/2014/main" id="{724BB392-FBF4-4462-87AE-C5ADD3A3FFDD}"/>
+                <a16:creationId xmlns:a16="http://schemas.microsoft.com/office/drawing/2014/main" id="{89CC1AEB-4BBC-492A-9EFD-C6750199AB45}"/>
               </a:ext>
             </a:extLst>
           </p:cNvPr>
@@ -11199,7 +11399,7 @@
           <p:cNvPr id="6" name="">
             <a:extLst xmlns:a="http://schemas.openxmlformats.org/drawingml/2006/main">
               <a:ext uri="{FF2B5EF4-FFF2-40B4-BE49-F238E27FC236}">
-                <a16:creationId xmlns:a16="http://schemas.microsoft.com/office/drawing/2014/main" id="{B8CA235E-1E14-4BB4-8A1C-5F3935F89573}"/>
+                <a16:creationId xmlns:a16="http://schemas.microsoft.com/office/drawing/2014/main" id="{E9FF1590-553D-4EBB-B1C8-CC05591581D7}"/>
               </a:ext>
             </a:extLst>
           </p:cNvPr>
@@ -11256,7 +11456,7 @@
           <p:cNvPr id="7" name="">
             <a:extLst xmlns:a="http://schemas.openxmlformats.org/drawingml/2006/main">
               <a:ext uri="{FF2B5EF4-FFF2-40B4-BE49-F238E27FC236}">
-                <a16:creationId xmlns:a16="http://schemas.microsoft.com/office/drawing/2014/main" id="{B456914D-90BE-41EF-BD7A-BDD116342548}"/>
+                <a16:creationId xmlns:a16="http://schemas.microsoft.com/office/drawing/2014/main" id="{3BCACE41-ED7E-4053-8298-106658A5BC9C}"/>
               </a:ext>
             </a:extLst>
           </p:cNvPr>
@@ -11288,7 +11488,7 @@
           <p:cNvPr id="8" name="">
             <a:extLst xmlns:a="http://schemas.openxmlformats.org/drawingml/2006/main">
               <a:ext uri="{FF2B5EF4-FFF2-40B4-BE49-F238E27FC236}">
-                <a16:creationId xmlns:a16="http://schemas.microsoft.com/office/drawing/2014/main" id="{B1FA36EF-A0B8-4E19-BEDC-8D55EE20134D}"/>
+                <a16:creationId xmlns:a16="http://schemas.microsoft.com/office/drawing/2014/main" id="{7E334C76-27D8-4B42-9383-3A4133679FB2}"/>
               </a:ext>
             </a:extLst>
           </p:cNvPr>
@@ -11345,7 +11545,7 @@
           <p:cNvPr id="9" name="">
             <a:extLst xmlns:a="http://schemas.openxmlformats.org/drawingml/2006/main">
               <a:ext uri="{FF2B5EF4-FFF2-40B4-BE49-F238E27FC236}">
-                <a16:creationId xmlns:a16="http://schemas.microsoft.com/office/drawing/2014/main" id="{DF08CD74-FAC6-4101-A80A-19739971392D}"/>
+                <a16:creationId xmlns:a16="http://schemas.microsoft.com/office/drawing/2014/main" id="{49831828-3260-4DB0-A4C3-8162577357E7}"/>
               </a:ext>
             </a:extLst>
           </p:cNvPr>
@@ -11406,7 +11606,7 @@
           <p:nvPr/>
         </p:nvPicPr>
         <p:blipFill>
-          <a:blip xmlns:r="http://schemas.openxmlformats.org/officeDocument/2006/relationships" xmlns:a="http://schemas.openxmlformats.org/drawingml/2006/main" r:embed="Rf9a843e5876f483b"/>
+          <a:blip xmlns:r="http://schemas.openxmlformats.org/officeDocument/2006/relationships" xmlns:a="http://schemas.openxmlformats.org/drawingml/2006/main" r:embed="Ra7cd18ffc2bf46a3"/>
           <a:stretch xmlns:a="http://schemas.openxmlformats.org/drawingml/2006/main"/>
         </p:blipFill>
         <p:spPr>
@@ -11424,7 +11624,7 @@
           <p:cNvPr id="11" name="">
             <a:extLst xmlns:a="http://schemas.openxmlformats.org/drawingml/2006/main">
               <a:ext uri="{FF2B5EF4-FFF2-40B4-BE49-F238E27FC236}">
-                <a16:creationId xmlns:a16="http://schemas.microsoft.com/office/drawing/2014/main" id="{12EE1501-7D79-4857-B2AD-9207B413A30D}"/>
+                <a16:creationId xmlns:a16="http://schemas.microsoft.com/office/drawing/2014/main" id="{9515D465-056C-4F64-8D61-B4B55DBC29A4}"/>
               </a:ext>
             </a:extLst>
           </p:cNvPr>
@@ -11481,7 +11681,7 @@
           <p:cNvPr id="12" name="">
             <a:extLst xmlns:a="http://schemas.openxmlformats.org/drawingml/2006/main">
               <a:ext uri="{FF2B5EF4-FFF2-40B4-BE49-F238E27FC236}">
-                <a16:creationId xmlns:a16="http://schemas.microsoft.com/office/drawing/2014/main" id="{179014A4-A8CD-4151-8A78-C1EE5498F732}"/>
+                <a16:creationId xmlns:a16="http://schemas.microsoft.com/office/drawing/2014/main" id="{D3D9E541-D996-4F15-928B-6DA7CDACA977}"/>
               </a:ext>
             </a:extLst>
           </p:cNvPr>
@@ -11538,7 +11738,7 @@
           <p:cNvPr id="13" name="">
             <a:extLst xmlns:a="http://schemas.openxmlformats.org/drawingml/2006/main">
               <a:ext uri="{FF2B5EF4-FFF2-40B4-BE49-F238E27FC236}">
-                <a16:creationId xmlns:a16="http://schemas.microsoft.com/office/drawing/2014/main" id="{5D7B570E-3F31-44F2-BB9F-D2F7DD8BBEF8}"/>
+                <a16:creationId xmlns:a16="http://schemas.microsoft.com/office/drawing/2014/main" id="{88197301-C265-412D-83ED-1B517DB2DCEE}"/>
               </a:ext>
             </a:extLst>
           </p:cNvPr>
@@ -11570,7 +11770,7 @@
           <p:cNvPr id="14" name="">
             <a:extLst xmlns:a="http://schemas.openxmlformats.org/drawingml/2006/main">
               <a:ext uri="{FF2B5EF4-FFF2-40B4-BE49-F238E27FC236}">
-                <a16:creationId xmlns:a16="http://schemas.microsoft.com/office/drawing/2014/main" id="{E8B0A545-5EA9-411B-936A-EB6926A5E47E}"/>
+                <a16:creationId xmlns:a16="http://schemas.microsoft.com/office/drawing/2014/main" id="{E4F0D1E6-4454-4221-8018-36741584C9B2}"/>
               </a:ext>
             </a:extLst>
           </p:cNvPr>
@@ -11627,7 +11827,7 @@
           <p:cNvPr id="15" name="">
             <a:extLst xmlns:a="http://schemas.openxmlformats.org/drawingml/2006/main">
               <a:ext uri="{FF2B5EF4-FFF2-40B4-BE49-F238E27FC236}">
-                <a16:creationId xmlns:a16="http://schemas.microsoft.com/office/drawing/2014/main" id="{0FBCBA3D-3BD9-4714-995F-04693688C985}"/>
+                <a16:creationId xmlns:a16="http://schemas.microsoft.com/office/drawing/2014/main" id="{AD41E972-B707-4B5B-9418-C576285F0865}"/>
               </a:ext>
             </a:extLst>
           </p:cNvPr>
@@ -11682,7 +11882,7 @@
     </p:spTree>
     <p:extLst>
       <p:ext uri="{BB962C8B-B14F-4D97-AF65-F5344CB8AC3E}">
-        <p14:creationId xmlns:p14="http://schemas.microsoft.com/office/powerpoint/2010/main" val="316680557"/>
+        <p14:creationId xmlns:p14="http://schemas.microsoft.com/office/powerpoint/2010/main" val="474403949"/>
       </p:ext>
     </p:extLst>
   </p:cSld>
@@ -11837,7 +12037,7 @@
           <p:cNvPr id="23" name="">
             <a:extLst xmlns:a="http://schemas.openxmlformats.org/drawingml/2006/main">
               <a:ext uri="{FF2B5EF4-FFF2-40B4-BE49-F238E27FC236}">
-                <a16:creationId xmlns:a16="http://schemas.microsoft.com/office/drawing/2014/main" id="{AB0F9AD7-CC38-45C1-8866-8F90979E1CF3}"/>
+                <a16:creationId xmlns:a16="http://schemas.microsoft.com/office/drawing/2014/main" id="{D2ABEDFE-1451-42E4-9245-FBE95E315BB6}"/>
               </a:ext>
             </a:extLst>
           </p:cNvPr>
@@ -11869,7 +12069,7 @@
           <p:cNvPr id="2" name="">
             <a:extLst xmlns:a="http://schemas.openxmlformats.org/drawingml/2006/main">
               <a:ext uri="{FF2B5EF4-FFF2-40B4-BE49-F238E27FC236}">
-                <a16:creationId xmlns:a16="http://schemas.microsoft.com/office/drawing/2014/main" id="{48320CA5-FF65-4C56-866B-7E9B5697117E}"/>
+                <a16:creationId xmlns:a16="http://schemas.microsoft.com/office/drawing/2014/main" id="{38AB08E1-787B-4C61-A47A-637BF6A81F35}"/>
               </a:ext>
             </a:extLst>
           </p:cNvPr>
@@ -11926,7 +12126,7 @@
           <p:cNvPr id="3" name="">
             <a:extLst xmlns:a="http://schemas.openxmlformats.org/drawingml/2006/main">
               <a:ext uri="{FF2B5EF4-FFF2-40B4-BE49-F238E27FC236}">
-                <a16:creationId xmlns:a16="http://schemas.microsoft.com/office/drawing/2014/main" id="{2C62079A-2740-4A6B-9C55-B950CED4A3E6}"/>
+                <a16:creationId xmlns:a16="http://schemas.microsoft.com/office/drawing/2014/main" id="{9DCB3A58-8539-4CCE-B82B-AE604E480E12}"/>
               </a:ext>
             </a:extLst>
           </p:cNvPr>
@@ -11958,7 +12158,7 @@
           <p:cNvPr id="4" name="">
             <a:extLst xmlns:a="http://schemas.openxmlformats.org/drawingml/2006/main">
               <a:ext uri="{FF2B5EF4-FFF2-40B4-BE49-F238E27FC236}">
-                <a16:creationId xmlns:a16="http://schemas.microsoft.com/office/drawing/2014/main" id="{6B34024A-F96A-41D6-A446-346D356A4225}"/>
+                <a16:creationId xmlns:a16="http://schemas.microsoft.com/office/drawing/2014/main" id="{9AD76FE9-4139-4295-B7F7-751C2D5B008B}"/>
               </a:ext>
             </a:extLst>
           </p:cNvPr>
@@ -12015,7 +12215,7 @@
           <p:cNvPr id="5" name="">
             <a:extLst xmlns:a="http://schemas.openxmlformats.org/drawingml/2006/main">
               <a:ext uri="{FF2B5EF4-FFF2-40B4-BE49-F238E27FC236}">
-                <a16:creationId xmlns:a16="http://schemas.microsoft.com/office/drawing/2014/main" id="{0303FDF9-F67B-4736-AFDD-0937BC963A20}"/>
+                <a16:creationId xmlns:a16="http://schemas.microsoft.com/office/drawing/2014/main" id="{1930C135-D10F-41F6-BCCB-F92A58D91514}"/>
               </a:ext>
             </a:extLst>
           </p:cNvPr>
@@ -12072,7 +12272,7 @@
           <p:cNvPr id="6" name="">
             <a:extLst xmlns:a="http://schemas.openxmlformats.org/drawingml/2006/main">
               <a:ext uri="{FF2B5EF4-FFF2-40B4-BE49-F238E27FC236}">
-                <a16:creationId xmlns:a16="http://schemas.microsoft.com/office/drawing/2014/main" id="{F4247AFA-4AAC-4E0C-8AF0-CB111249E9C8}"/>
+                <a16:creationId xmlns:a16="http://schemas.microsoft.com/office/drawing/2014/main" id="{6F7A70B1-A2E7-4DFC-9B3F-CFFB24B9B8FC}"/>
               </a:ext>
             </a:extLst>
           </p:cNvPr>
@@ -12129,7 +12329,7 @@
           <p:cNvPr id="7" name="">
             <a:extLst xmlns:a="http://schemas.openxmlformats.org/drawingml/2006/main">
               <a:ext uri="{FF2B5EF4-FFF2-40B4-BE49-F238E27FC236}">
-                <a16:creationId xmlns:a16="http://schemas.microsoft.com/office/drawing/2014/main" id="{87B53C17-1B8A-413C-A67B-0BD2EF12FCE0}"/>
+                <a16:creationId xmlns:a16="http://schemas.microsoft.com/office/drawing/2014/main" id="{BDA878BB-2146-4635-BB5C-A853BF243BF4}"/>
               </a:ext>
             </a:extLst>
           </p:cNvPr>
@@ -12161,7 +12361,7 @@
           <p:cNvPr id="8" name="">
             <a:extLst xmlns:a="http://schemas.openxmlformats.org/drawingml/2006/main">
               <a:ext uri="{FF2B5EF4-FFF2-40B4-BE49-F238E27FC236}">
-                <a16:creationId xmlns:a16="http://schemas.microsoft.com/office/drawing/2014/main" id="{68327B0E-E93B-41CD-80A3-C4E4BF7DC402}"/>
+                <a16:creationId xmlns:a16="http://schemas.microsoft.com/office/drawing/2014/main" id="{E3D25C76-C1B2-44F2-8BD0-1DD39EDE28FA}"/>
               </a:ext>
             </a:extLst>
           </p:cNvPr>
@@ -12218,7 +12418,7 @@
           <p:cNvPr id="9" name="">
             <a:extLst xmlns:a="http://schemas.openxmlformats.org/drawingml/2006/main">
               <a:ext uri="{FF2B5EF4-FFF2-40B4-BE49-F238E27FC236}">
-                <a16:creationId xmlns:a16="http://schemas.microsoft.com/office/drawing/2014/main" id="{D01A8E39-C56B-4603-B7DF-7C73A08A259B}"/>
+                <a16:creationId xmlns:a16="http://schemas.microsoft.com/office/drawing/2014/main" id="{46722D1F-8F3B-488C-9E4A-2B8E6F89CF5A}"/>
               </a:ext>
             </a:extLst>
           </p:cNvPr>
@@ -12275,7 +12475,7 @@
           <p:cNvPr id="10" name="">
             <a:extLst xmlns:a="http://schemas.openxmlformats.org/drawingml/2006/main">
               <a:ext uri="{FF2B5EF4-FFF2-40B4-BE49-F238E27FC236}">
-                <a16:creationId xmlns:a16="http://schemas.microsoft.com/office/drawing/2014/main" id="{20978539-07C1-4ECD-8898-B9AC951745E9}"/>
+                <a16:creationId xmlns:a16="http://schemas.microsoft.com/office/drawing/2014/main" id="{53DFFE9C-1F92-4EE7-A273-EFE96110E538}"/>
               </a:ext>
             </a:extLst>
           </p:cNvPr>
@@ -12309,7 +12509,7 @@
           <p:cNvPr id="11" name="">
             <a:extLst xmlns:a="http://schemas.openxmlformats.org/drawingml/2006/main">
               <a:ext uri="{FF2B5EF4-FFF2-40B4-BE49-F238E27FC236}">
-                <a16:creationId xmlns:a16="http://schemas.microsoft.com/office/drawing/2014/main" id="{00B8DD7C-EC96-4073-8096-F85C70A0ED25}"/>
+                <a16:creationId xmlns:a16="http://schemas.microsoft.com/office/drawing/2014/main" id="{8D6B83E6-1346-46DD-9079-B62672E735F8}"/>
               </a:ext>
             </a:extLst>
           </p:cNvPr>
@@ -12341,7 +12541,7 @@
           <p:cNvPr id="12" name="">
             <a:extLst xmlns:a="http://schemas.openxmlformats.org/drawingml/2006/main">
               <a:ext uri="{FF2B5EF4-FFF2-40B4-BE49-F238E27FC236}">
-                <a16:creationId xmlns:a16="http://schemas.microsoft.com/office/drawing/2014/main" id="{9BF05DA7-581C-4336-9AAD-57EB6D1D5FDE}"/>
+                <a16:creationId xmlns:a16="http://schemas.microsoft.com/office/drawing/2014/main" id="{8FD683FB-9D23-4712-8F40-B7A6F73F3928}"/>
               </a:ext>
             </a:extLst>
           </p:cNvPr>
@@ -12398,7 +12598,7 @@
           <p:cNvPr id="13" name="">
             <a:extLst xmlns:a="http://schemas.openxmlformats.org/drawingml/2006/main">
               <a:ext uri="{FF2B5EF4-FFF2-40B4-BE49-F238E27FC236}">
-                <a16:creationId xmlns:a16="http://schemas.microsoft.com/office/drawing/2014/main" id="{90FF91CF-89F5-4398-B29A-31C1427C52EB}"/>
+                <a16:creationId xmlns:a16="http://schemas.microsoft.com/office/drawing/2014/main" id="{DAF39F8C-0E3B-4FF0-9417-730EA572800D}"/>
               </a:ext>
             </a:extLst>
           </p:cNvPr>
@@ -12455,7 +12655,7 @@
           <p:cNvPr id="14" name="">
             <a:extLst xmlns:a="http://schemas.openxmlformats.org/drawingml/2006/main">
               <a:ext uri="{FF2B5EF4-FFF2-40B4-BE49-F238E27FC236}">
-                <a16:creationId xmlns:a16="http://schemas.microsoft.com/office/drawing/2014/main" id="{0B2383F1-42A9-4CF6-813C-AB47DF239323}"/>
+                <a16:creationId xmlns:a16="http://schemas.microsoft.com/office/drawing/2014/main" id="{D09E83BC-D281-4E05-9B29-40C31D5CC1B8}"/>
               </a:ext>
             </a:extLst>
           </p:cNvPr>
@@ -12489,7 +12689,7 @@
           <p:cNvPr id="15" name="">
             <a:extLst xmlns:a="http://schemas.openxmlformats.org/drawingml/2006/main">
               <a:ext uri="{FF2B5EF4-FFF2-40B4-BE49-F238E27FC236}">
-                <a16:creationId xmlns:a16="http://schemas.microsoft.com/office/drawing/2014/main" id="{B72581C4-51AB-487A-8308-B7E8D27304B5}"/>
+                <a16:creationId xmlns:a16="http://schemas.microsoft.com/office/drawing/2014/main" id="{4805681C-4F0F-422C-817B-6BC0A88A346B}"/>
               </a:ext>
             </a:extLst>
           </p:cNvPr>
@@ -12521,7 +12721,7 @@
           <p:cNvPr id="16" name="">
             <a:extLst xmlns:a="http://schemas.openxmlformats.org/drawingml/2006/main">
               <a:ext uri="{FF2B5EF4-FFF2-40B4-BE49-F238E27FC236}">
-                <a16:creationId xmlns:a16="http://schemas.microsoft.com/office/drawing/2014/main" id="{BD67A473-1AD8-4EDB-8C91-9617BC29736B}"/>
+                <a16:creationId xmlns:a16="http://schemas.microsoft.com/office/drawing/2014/main" id="{066D4ADD-BC80-4DD2-A544-2BD860ADAB93}"/>
               </a:ext>
             </a:extLst>
           </p:cNvPr>
@@ -12578,7 +12778,7 @@
           <p:cNvPr id="17" name="">
             <a:extLst xmlns:a="http://schemas.openxmlformats.org/drawingml/2006/main">
               <a:ext uri="{FF2B5EF4-FFF2-40B4-BE49-F238E27FC236}">
-                <a16:creationId xmlns:a16="http://schemas.microsoft.com/office/drawing/2014/main" id="{5686BC78-61EB-4FBD-AA7B-D42B26A5AEF2}"/>
+                <a16:creationId xmlns:a16="http://schemas.microsoft.com/office/drawing/2014/main" id="{8020C307-A4D1-4D1B-A9A6-D0341A9C79F7}"/>
               </a:ext>
             </a:extLst>
           </p:cNvPr>
@@ -12635,7 +12835,7 @@
           <p:cNvPr id="18" name="">
             <a:extLst xmlns:a="http://schemas.openxmlformats.org/drawingml/2006/main">
               <a:ext uri="{FF2B5EF4-FFF2-40B4-BE49-F238E27FC236}">
-                <a16:creationId xmlns:a16="http://schemas.microsoft.com/office/drawing/2014/main" id="{C42D9F0A-A3B6-40D1-BA56-DBE3B9D32A29}"/>
+                <a16:creationId xmlns:a16="http://schemas.microsoft.com/office/drawing/2014/main" id="{D7341FF8-AC7F-4C73-9333-4755073552E3}"/>
               </a:ext>
             </a:extLst>
           </p:cNvPr>
@@ -12669,7 +12869,7 @@
           <p:cNvPr id="19" name="">
             <a:extLst xmlns:a="http://schemas.openxmlformats.org/drawingml/2006/main">
               <a:ext uri="{FF2B5EF4-FFF2-40B4-BE49-F238E27FC236}">
-                <a16:creationId xmlns:a16="http://schemas.microsoft.com/office/drawing/2014/main" id="{61ECB8FD-DDAE-4EEC-95C1-D06E94689D3A}"/>
+                <a16:creationId xmlns:a16="http://schemas.microsoft.com/office/drawing/2014/main" id="{690DCE97-414B-4786-938E-824D9CAB7D70}"/>
               </a:ext>
             </a:extLst>
           </p:cNvPr>
@@ -12701,7 +12901,7 @@
           <p:cNvPr id="20" name="">
             <a:extLst xmlns:a="http://schemas.openxmlformats.org/drawingml/2006/main">
               <a:ext uri="{FF2B5EF4-FFF2-40B4-BE49-F238E27FC236}">
-                <a16:creationId xmlns:a16="http://schemas.microsoft.com/office/drawing/2014/main" id="{6A4A80D6-019D-4235-A2D4-D93DBC8AA333}"/>
+                <a16:creationId xmlns:a16="http://schemas.microsoft.com/office/drawing/2014/main" id="{2E49CD75-EA9F-4A74-B54E-3892D54A7CA1}"/>
               </a:ext>
             </a:extLst>
           </p:cNvPr>
@@ -12758,7 +12958,7 @@
           <p:cNvPr id="21" name="">
             <a:extLst xmlns:a="http://schemas.openxmlformats.org/drawingml/2006/main">
               <a:ext uri="{FF2B5EF4-FFF2-40B4-BE49-F238E27FC236}">
-                <a16:creationId xmlns:a16="http://schemas.microsoft.com/office/drawing/2014/main" id="{D3D965F0-9310-4C5B-ADF3-89CD9614EC0A}"/>
+                <a16:creationId xmlns:a16="http://schemas.microsoft.com/office/drawing/2014/main" id="{53E18404-E028-4BB0-8DB2-2FB3FA8CB9CB}"/>
               </a:ext>
             </a:extLst>
           </p:cNvPr>
@@ -12815,7 +13015,7 @@
           <p:cNvPr id="22" name="">
             <a:extLst xmlns:a="http://schemas.openxmlformats.org/drawingml/2006/main">
               <a:ext uri="{FF2B5EF4-FFF2-40B4-BE49-F238E27FC236}">
-                <a16:creationId xmlns:a16="http://schemas.microsoft.com/office/drawing/2014/main" id="{843D3D18-57D1-44E7-99FE-9F15C424135F}"/>
+                <a16:creationId xmlns:a16="http://schemas.microsoft.com/office/drawing/2014/main" id="{2E3F0611-85D3-4621-B440-FA89A2D81E41}"/>
               </a:ext>
             </a:extLst>
           </p:cNvPr>
@@ -12870,7 +13070,7 @@
     </p:spTree>
     <p:extLst>
       <p:ext uri="{BB962C8B-B14F-4D97-AF65-F5344CB8AC3E}">
-        <p14:creationId xmlns:p14="http://schemas.microsoft.com/office/powerpoint/2010/main" val="1780375389"/>
+        <p14:creationId xmlns:p14="http://schemas.microsoft.com/office/powerpoint/2010/main" val="1439731232"/>
       </p:ext>
     </p:extLst>
   </p:cSld>
@@ -13071,7 +13271,7 @@
           <p:cNvPr id="22" name="">
             <a:extLst xmlns:a="http://schemas.openxmlformats.org/drawingml/2006/main">
               <a:ext uri="{FF2B5EF4-FFF2-40B4-BE49-F238E27FC236}">
-                <a16:creationId xmlns:a16="http://schemas.microsoft.com/office/drawing/2014/main" id="{B7632920-AD1D-40A2-882D-6E6ABEE8E513}"/>
+                <a16:creationId xmlns:a16="http://schemas.microsoft.com/office/drawing/2014/main" id="{AE5E0DA1-0F05-4076-8095-6202BEB34787}"/>
               </a:ext>
             </a:extLst>
           </p:cNvPr>
@@ -13103,7 +13303,7 @@
           <p:cNvPr id="2" name="">
             <a:extLst xmlns:a="http://schemas.openxmlformats.org/drawingml/2006/main">
               <a:ext uri="{FF2B5EF4-FFF2-40B4-BE49-F238E27FC236}">
-                <a16:creationId xmlns:a16="http://schemas.microsoft.com/office/drawing/2014/main" id="{32C2C3D1-CF90-47C7-9F43-EA90CD13667F}"/>
+                <a16:creationId xmlns:a16="http://schemas.microsoft.com/office/drawing/2014/main" id="{DC8E16E9-DFC4-4A0E-BFA2-88D0043AA4F9}"/>
               </a:ext>
             </a:extLst>
           </p:cNvPr>
@@ -13160,7 +13360,7 @@
           <p:cNvPr id="3" name="">
             <a:extLst xmlns:a="http://schemas.openxmlformats.org/drawingml/2006/main">
               <a:ext uri="{FF2B5EF4-FFF2-40B4-BE49-F238E27FC236}">
-                <a16:creationId xmlns:a16="http://schemas.microsoft.com/office/drawing/2014/main" id="{549F06D3-6057-41F3-958D-C3999695733A}"/>
+                <a16:creationId xmlns:a16="http://schemas.microsoft.com/office/drawing/2014/main" id="{E265BC11-DCAC-4793-A5E9-CAF1108F24FD}"/>
               </a:ext>
             </a:extLst>
           </p:cNvPr>
@@ -13192,7 +13392,7 @@
           <p:cNvPr id="4" name="">
             <a:extLst xmlns:a="http://schemas.openxmlformats.org/drawingml/2006/main">
               <a:ext uri="{FF2B5EF4-FFF2-40B4-BE49-F238E27FC236}">
-                <a16:creationId xmlns:a16="http://schemas.microsoft.com/office/drawing/2014/main" id="{E43A656D-52B8-41C1-BF5B-100CAB769E56}"/>
+                <a16:creationId xmlns:a16="http://schemas.microsoft.com/office/drawing/2014/main" id="{50AD9465-84EA-4E3B-A97E-530A9B7B81DD}"/>
               </a:ext>
             </a:extLst>
           </p:cNvPr>
@@ -13249,7 +13449,7 @@
           <p:cNvPr id="5" name="">
             <a:extLst xmlns:a="http://schemas.openxmlformats.org/drawingml/2006/main">
               <a:ext uri="{FF2B5EF4-FFF2-40B4-BE49-F238E27FC236}">
-                <a16:creationId xmlns:a16="http://schemas.microsoft.com/office/drawing/2014/main" id="{A4006130-64BF-4D99-8B54-D54977295F1C}"/>
+                <a16:creationId xmlns:a16="http://schemas.microsoft.com/office/drawing/2014/main" id="{2393A806-7879-4B68-89F9-BC9D47227B51}"/>
               </a:ext>
             </a:extLst>
           </p:cNvPr>
@@ -13306,7 +13506,7 @@
           <p:cNvPr id="6" name="">
             <a:extLst xmlns:a="http://schemas.openxmlformats.org/drawingml/2006/main">
               <a:ext uri="{FF2B5EF4-FFF2-40B4-BE49-F238E27FC236}">
-                <a16:creationId xmlns:a16="http://schemas.microsoft.com/office/drawing/2014/main" id="{D5E7AF11-EF82-4396-A51C-FFE8586D1285}"/>
+                <a16:creationId xmlns:a16="http://schemas.microsoft.com/office/drawing/2014/main" id="{CF813A69-5E0E-4C9D-A5D7-759ECC9BDCC4}"/>
               </a:ext>
             </a:extLst>
           </p:cNvPr>
@@ -13363,7 +13563,7 @@
           <p:cNvPr id="7" name="">
             <a:extLst xmlns:a="http://schemas.openxmlformats.org/drawingml/2006/main">
               <a:ext uri="{FF2B5EF4-FFF2-40B4-BE49-F238E27FC236}">
-                <a16:creationId xmlns:a16="http://schemas.microsoft.com/office/drawing/2014/main" id="{AE12EF66-FE28-47E0-A928-1CE8CF611428}"/>
+                <a16:creationId xmlns:a16="http://schemas.microsoft.com/office/drawing/2014/main" id="{65CFCE58-4951-4BFA-9427-80C0AE84F8A3}"/>
               </a:ext>
             </a:extLst>
           </p:cNvPr>
@@ -13395,7 +13595,7 @@
           <p:cNvPr id="8" name="">
             <a:extLst xmlns:a="http://schemas.openxmlformats.org/drawingml/2006/main">
               <a:ext uri="{FF2B5EF4-FFF2-40B4-BE49-F238E27FC236}">
-                <a16:creationId xmlns:a16="http://schemas.microsoft.com/office/drawing/2014/main" id="{0C2E9251-BB58-49B1-9840-9E312B6B4584}"/>
+                <a16:creationId xmlns:a16="http://schemas.microsoft.com/office/drawing/2014/main" id="{F7435E56-C221-4335-A48F-7DDF8FDB3188}"/>
               </a:ext>
             </a:extLst>
           </p:cNvPr>
@@ -13452,7 +13652,7 @@
           <p:cNvPr id="9" name="">
             <a:extLst xmlns:a="http://schemas.openxmlformats.org/drawingml/2006/main">
               <a:ext uri="{FF2B5EF4-FFF2-40B4-BE49-F238E27FC236}">
-                <a16:creationId xmlns:a16="http://schemas.microsoft.com/office/drawing/2014/main" id="{BF4B766C-E3C6-4990-A964-4782319DE4FC}"/>
+                <a16:creationId xmlns:a16="http://schemas.microsoft.com/office/drawing/2014/main" id="{9DCE6234-DB09-4137-80FC-6CC5D492038B}"/>
               </a:ext>
             </a:extLst>
           </p:cNvPr>
@@ -13509,7 +13709,7 @@
           <p:cNvPr id="10" name="">
             <a:extLst xmlns:a="http://schemas.openxmlformats.org/drawingml/2006/main">
               <a:ext uri="{FF2B5EF4-FFF2-40B4-BE49-F238E27FC236}">
-                <a16:creationId xmlns:a16="http://schemas.microsoft.com/office/drawing/2014/main" id="{74C5DA7F-7037-4CCC-A21C-8BCCDF108CFF}"/>
+                <a16:creationId xmlns:a16="http://schemas.microsoft.com/office/drawing/2014/main" id="{48F2B332-122C-4CB5-A5B4-BE2125105043}"/>
               </a:ext>
             </a:extLst>
           </p:cNvPr>
@@ -13543,7 +13743,7 @@
           <p:cNvPr id="11" name="">
             <a:extLst xmlns:a="http://schemas.openxmlformats.org/drawingml/2006/main">
               <a:ext uri="{FF2B5EF4-FFF2-40B4-BE49-F238E27FC236}">
-                <a16:creationId xmlns:a16="http://schemas.microsoft.com/office/drawing/2014/main" id="{9CB89ECC-3284-4FBA-9E32-8FFCDB7FEC76}"/>
+                <a16:creationId xmlns:a16="http://schemas.microsoft.com/office/drawing/2014/main" id="{14166959-B6AD-4DB9-B7AB-969D767441AC}"/>
               </a:ext>
             </a:extLst>
           </p:cNvPr>
@@ -13575,7 +13775,7 @@
           <p:cNvPr id="12" name="">
             <a:extLst xmlns:a="http://schemas.openxmlformats.org/drawingml/2006/main">
               <a:ext uri="{FF2B5EF4-FFF2-40B4-BE49-F238E27FC236}">
-                <a16:creationId xmlns:a16="http://schemas.microsoft.com/office/drawing/2014/main" id="{C0BF2035-EBED-473E-969C-6497D453C873}"/>
+                <a16:creationId xmlns:a16="http://schemas.microsoft.com/office/drawing/2014/main" id="{78074D82-D7C8-4D64-9BAE-E114FB79931C}"/>
               </a:ext>
             </a:extLst>
           </p:cNvPr>
@@ -13632,7 +13832,7 @@
           <p:cNvPr id="13" name="">
             <a:extLst xmlns:a="http://schemas.openxmlformats.org/drawingml/2006/main">
               <a:ext uri="{FF2B5EF4-FFF2-40B4-BE49-F238E27FC236}">
-                <a16:creationId xmlns:a16="http://schemas.microsoft.com/office/drawing/2014/main" id="{9F61405B-3624-427B-A5C7-240AD4F7A0D1}"/>
+                <a16:creationId xmlns:a16="http://schemas.microsoft.com/office/drawing/2014/main" id="{4228CC42-CE4C-4130-B7AC-8CB6817AD315}"/>
               </a:ext>
             </a:extLst>
           </p:cNvPr>
@@ -13689,7 +13889,7 @@
           <p:cNvPr id="14" name="">
             <a:extLst xmlns:a="http://schemas.openxmlformats.org/drawingml/2006/main">
               <a:ext uri="{FF2B5EF4-FFF2-40B4-BE49-F238E27FC236}">
-                <a16:creationId xmlns:a16="http://schemas.microsoft.com/office/drawing/2014/main" id="{E68985DD-B901-4825-A71E-881C538B7065}"/>
+                <a16:creationId xmlns:a16="http://schemas.microsoft.com/office/drawing/2014/main" id="{40009493-688E-4DC3-B640-57396136D315}"/>
               </a:ext>
             </a:extLst>
           </p:cNvPr>
@@ -13723,7 +13923,7 @@
           <p:cNvPr id="15" name="">
             <a:extLst xmlns:a="http://schemas.openxmlformats.org/drawingml/2006/main">
               <a:ext uri="{FF2B5EF4-FFF2-40B4-BE49-F238E27FC236}">
-                <a16:creationId xmlns:a16="http://schemas.microsoft.com/office/drawing/2014/main" id="{A1E62DC1-78E5-4EA1-9EC2-EB03933602D7}"/>
+                <a16:creationId xmlns:a16="http://schemas.microsoft.com/office/drawing/2014/main" id="{2DFBD727-F6E0-40A1-8875-7A5B1AC45EB4}"/>
               </a:ext>
             </a:extLst>
           </p:cNvPr>
@@ -13755,7 +13955,7 @@
           <p:cNvPr id="16" name="">
             <a:extLst xmlns:a="http://schemas.openxmlformats.org/drawingml/2006/main">
               <a:ext uri="{FF2B5EF4-FFF2-40B4-BE49-F238E27FC236}">
-                <a16:creationId xmlns:a16="http://schemas.microsoft.com/office/drawing/2014/main" id="{3F8DA567-25C3-460F-B9E4-64323F1DD598}"/>
+                <a16:creationId xmlns:a16="http://schemas.microsoft.com/office/drawing/2014/main" id="{AF6CF016-C9F7-432B-82BE-6399D8C19FF7}"/>
               </a:ext>
             </a:extLst>
           </p:cNvPr>
@@ -13812,7 +14012,7 @@
           <p:cNvPr id="17" name="">
             <a:extLst xmlns:a="http://schemas.openxmlformats.org/drawingml/2006/main">
               <a:ext uri="{FF2B5EF4-FFF2-40B4-BE49-F238E27FC236}">
-                <a16:creationId xmlns:a16="http://schemas.microsoft.com/office/drawing/2014/main" id="{BB5825EC-0E93-4D42-850A-1F1A4B1FF674}"/>
+                <a16:creationId xmlns:a16="http://schemas.microsoft.com/office/drawing/2014/main" id="{88AC45BA-2EB0-4267-8A79-873B0489753B}"/>
               </a:ext>
             </a:extLst>
           </p:cNvPr>
@@ -13869,7 +14069,7 @@
           <p:cNvPr id="18" name="">
             <a:extLst xmlns:a="http://schemas.openxmlformats.org/drawingml/2006/main">
               <a:ext uri="{FF2B5EF4-FFF2-40B4-BE49-F238E27FC236}">
-                <a16:creationId xmlns:a16="http://schemas.microsoft.com/office/drawing/2014/main" id="{9E9DB7A1-51F2-4A45-BE7A-D8D3FD6A419B}"/>
+                <a16:creationId xmlns:a16="http://schemas.microsoft.com/office/drawing/2014/main" id="{410376E7-18AE-42C3-AD6F-5E8074BBA9BE}"/>
               </a:ext>
             </a:extLst>
           </p:cNvPr>
@@ -13903,7 +14103,7 @@
           <p:cNvPr id="19" name="">
             <a:extLst xmlns:a="http://schemas.openxmlformats.org/drawingml/2006/main">
               <a:ext uri="{FF2B5EF4-FFF2-40B4-BE49-F238E27FC236}">
-                <a16:creationId xmlns:a16="http://schemas.microsoft.com/office/drawing/2014/main" id="{B3C5938F-DFFE-40E4-9B31-1C15850BEB85}"/>
+                <a16:creationId xmlns:a16="http://schemas.microsoft.com/office/drawing/2014/main" id="{BF56E8D5-7E82-4EA4-B6F5-F187F398BDCE}"/>
               </a:ext>
             </a:extLst>
           </p:cNvPr>
@@ -13935,7 +14135,7 @@
           <p:cNvPr id="20" name="">
             <a:extLst xmlns:a="http://schemas.openxmlformats.org/drawingml/2006/main">
               <a:ext uri="{FF2B5EF4-FFF2-40B4-BE49-F238E27FC236}">
-                <a16:creationId xmlns:a16="http://schemas.microsoft.com/office/drawing/2014/main" id="{AAD18B67-2A87-4703-A73F-BDCFD4E5A98B}"/>
+                <a16:creationId xmlns:a16="http://schemas.microsoft.com/office/drawing/2014/main" id="{3A37E6B8-4508-4F23-8D6E-81D2F1FE2D5A}"/>
               </a:ext>
             </a:extLst>
           </p:cNvPr>
@@ -13992,7 +14192,7 @@
           <p:cNvPr id="21" name="">
             <a:extLst xmlns:a="http://schemas.openxmlformats.org/drawingml/2006/main">
               <a:ext uri="{FF2B5EF4-FFF2-40B4-BE49-F238E27FC236}">
-                <a16:creationId xmlns:a16="http://schemas.microsoft.com/office/drawing/2014/main" id="{C0B026C5-72CC-4E06-BE9D-B2A0647A0AB2}"/>
+                <a16:creationId xmlns:a16="http://schemas.microsoft.com/office/drawing/2014/main" id="{6372D54C-00F1-4107-9BE1-0E0753F3E72B}"/>
               </a:ext>
             </a:extLst>
           </p:cNvPr>
@@ -14047,7 +14247,7 @@
     </p:spTree>
     <p:extLst>
       <p:ext uri="{BB962C8B-B14F-4D97-AF65-F5344CB8AC3E}">
-        <p14:creationId xmlns:p14="http://schemas.microsoft.com/office/powerpoint/2010/main" val="381484764"/>
+        <p14:creationId xmlns:p14="http://schemas.microsoft.com/office/powerpoint/2010/main" val="2025651041"/>
       </p:ext>
     </p:extLst>
   </p:cSld>
